--- a/interop-europe/ERA-ontology-reusability.pptx
+++ b/interop-europe/ERA-ontology-reusability.pptx
@@ -5,17 +5,17 @@
     <p:sldMasterId id="2147483648" r:id="rId1"/>
   </p:sldMasterIdLst>
   <p:sldIdLst>
-    <p:sldId id="256" r:id="rId7"/>
-    <p:sldId id="257" r:id="rId8"/>
-    <p:sldId id="258" r:id="rId9"/>
-    <p:sldId id="259" r:id="rId10"/>
-    <p:sldId id="260" r:id="rId11"/>
-    <p:sldId id="261" r:id="rId12"/>
-    <p:sldId id="262" r:id="rId13"/>
-    <p:sldId id="263" r:id="rId14"/>
-    <p:sldId id="264" r:id="rId15"/>
+    <p:sldId id="256" r:id="rId2"/>
+    <p:sldId id="257" r:id="rId3"/>
+    <p:sldId id="258" r:id="rId4"/>
+    <p:sldId id="259" r:id="rId5"/>
+    <p:sldId id="260" r:id="rId6"/>
+    <p:sldId id="261" r:id="rId7"/>
+    <p:sldId id="262" r:id="rId8"/>
+    <p:sldId id="263" r:id="rId9"/>
+    <p:sldId id="264" r:id="rId10"/>
   </p:sldIdLst>
-  <p:sldSz cx="12191695" cy="6858000" type="screen4x3"/>
+  <p:sldSz cx="12192000" cy="6858000"/>
   <p:notesSz cx="6858000" cy="9144000"/>
   <p:defaultTextStyle>
     <a:defPPr>
@@ -112,6 +112,22 @@
       </a:defRPr>
     </a:lvl9pPr>
   </p:defaultTextStyle>
+  <p:extLst>
+    <p:ext uri="{EFAFB233-063F-42B5-8137-9DF3F51BA10A}">
+      <p15:sldGuideLst xmlns:p15="http://schemas.microsoft.com/office/powerpoint/2012/main">
+        <p15:guide id="1" orient="horz" pos="2160">
+          <p15:clr>
+            <a:srgbClr val="A4A3A4"/>
+          </p15:clr>
+        </p15:guide>
+        <p15:guide id="2" pos="2880">
+          <p15:clr>
+            <a:srgbClr val="A4A3A4"/>
+          </p15:clr>
+        </p15:guide>
+      </p15:sldGuideLst>
+    </p:ext>
+  </p:extLst>
 </p:presentation>
 </file>
 
@@ -153,10 +169,9 @@
           <a:lstStyle/>
           <a:p>
             <a:r>
-              <a:rPr lang="en-US" smtClean="0"/>
+              <a:rPr lang="en-US"/>
               <a:t>Click to edit Master title style</a:t>
             </a:r>
-            <a:endParaRPr lang="en-US"/>
           </a:p>
         </p:txBody>
       </p:sp>
@@ -272,10 +287,9 @@
           </a:lstStyle>
           <a:p>
             <a:r>
-              <a:rPr lang="en-US" smtClean="0"/>
+              <a:rPr lang="en-US"/>
               <a:t>Click to edit Master subtitle style</a:t>
             </a:r>
-            <a:endParaRPr lang="en-US"/>
           </a:p>
         </p:txBody>
       </p:sp>
@@ -296,7 +310,7 @@
           <a:p>
             <a:fld id="{5BCAD085-E8A6-8845-BD4E-CB4CCA059FC4}" type="datetimeFigureOut">
               <a:rPr lang="en-US" smtClean="0"/>
-              <a:t>1/27/13</a:t>
+              <a:t>9/3/26</a:t>
             </a:fld>
             <a:endParaRPr lang="en-US"/>
           </a:p>
@@ -338,7 +352,7 @@
           <a:p>
             <a:fld id="{C1FF6DA9-008F-8B48-92A6-B652298478BF}" type="slidenum">
               <a:rPr lang="en-US" smtClean="0"/>
-              <a:t>‹#›</a:t>
+              <a:t>‹N°›</a:t>
             </a:fld>
             <a:endParaRPr lang="en-US"/>
           </a:p>
@@ -390,10 +404,9 @@
           <a:lstStyle/>
           <a:p>
             <a:r>
-              <a:rPr lang="en-US" smtClean="0"/>
+              <a:rPr lang="en-US"/>
               <a:t>Click to edit Master title style</a:t>
             </a:r>
-            <a:endParaRPr lang="en-US"/>
           </a:p>
         </p:txBody>
       </p:sp>
@@ -414,38 +427,37 @@
           <a:p>
             <a:pPr lvl="0"/>
             <a:r>
-              <a:rPr lang="en-US" smtClean="0"/>
+              <a:rPr lang="en-US"/>
               <a:t>Click to edit Master text styles</a:t>
             </a:r>
           </a:p>
           <a:p>
             <a:pPr lvl="1"/>
             <a:r>
-              <a:rPr lang="en-US" smtClean="0"/>
+              <a:rPr lang="en-US"/>
               <a:t>Second level</a:t>
             </a:r>
           </a:p>
           <a:p>
             <a:pPr lvl="2"/>
             <a:r>
-              <a:rPr lang="en-US" smtClean="0"/>
+              <a:rPr lang="en-US"/>
               <a:t>Third level</a:t>
             </a:r>
           </a:p>
           <a:p>
             <a:pPr lvl="3"/>
             <a:r>
-              <a:rPr lang="en-US" smtClean="0"/>
+              <a:rPr lang="en-US"/>
               <a:t>Fourth level</a:t>
             </a:r>
           </a:p>
           <a:p>
             <a:pPr lvl="4"/>
             <a:r>
-              <a:rPr lang="en-US" smtClean="0"/>
+              <a:rPr lang="en-US"/>
               <a:t>Fifth level</a:t>
             </a:r>
-            <a:endParaRPr lang="en-US"/>
           </a:p>
         </p:txBody>
       </p:sp>
@@ -466,7 +478,7 @@
           <a:p>
             <a:fld id="{5BCAD085-E8A6-8845-BD4E-CB4CCA059FC4}" type="datetimeFigureOut">
               <a:rPr lang="en-US" smtClean="0"/>
-              <a:t>1/27/13</a:t>
+              <a:t>9/3/26</a:t>
             </a:fld>
             <a:endParaRPr lang="en-US"/>
           </a:p>
@@ -508,7 +520,7 @@
           <a:p>
             <a:fld id="{C1FF6DA9-008F-8B48-92A6-B652298478BF}" type="slidenum">
               <a:rPr lang="en-US" smtClean="0"/>
-              <a:t>‹#›</a:t>
+              <a:t>‹N°›</a:t>
             </a:fld>
             <a:endParaRPr lang="en-US"/>
           </a:p>
@@ -565,10 +577,9 @@
           <a:lstStyle/>
           <a:p>
             <a:r>
-              <a:rPr lang="en-US" smtClean="0"/>
+              <a:rPr lang="en-US"/>
               <a:t>Click to edit Master title style</a:t>
             </a:r>
-            <a:endParaRPr lang="en-US"/>
           </a:p>
         </p:txBody>
       </p:sp>
@@ -594,38 +605,37 @@
           <a:p>
             <a:pPr lvl="0"/>
             <a:r>
-              <a:rPr lang="en-US" smtClean="0"/>
+              <a:rPr lang="en-US"/>
               <a:t>Click to edit Master text styles</a:t>
             </a:r>
           </a:p>
           <a:p>
             <a:pPr lvl="1"/>
             <a:r>
-              <a:rPr lang="en-US" smtClean="0"/>
+              <a:rPr lang="en-US"/>
               <a:t>Second level</a:t>
             </a:r>
           </a:p>
           <a:p>
             <a:pPr lvl="2"/>
             <a:r>
-              <a:rPr lang="en-US" smtClean="0"/>
+              <a:rPr lang="en-US"/>
               <a:t>Third level</a:t>
             </a:r>
           </a:p>
           <a:p>
             <a:pPr lvl="3"/>
             <a:r>
-              <a:rPr lang="en-US" smtClean="0"/>
+              <a:rPr lang="en-US"/>
               <a:t>Fourth level</a:t>
             </a:r>
           </a:p>
           <a:p>
             <a:pPr lvl="4"/>
             <a:r>
-              <a:rPr lang="en-US" smtClean="0"/>
+              <a:rPr lang="en-US"/>
               <a:t>Fifth level</a:t>
             </a:r>
-            <a:endParaRPr lang="en-US"/>
           </a:p>
         </p:txBody>
       </p:sp>
@@ -646,7 +656,7 @@
           <a:p>
             <a:fld id="{5BCAD085-E8A6-8845-BD4E-CB4CCA059FC4}" type="datetimeFigureOut">
               <a:rPr lang="en-US" smtClean="0"/>
-              <a:t>1/27/13</a:t>
+              <a:t>9/3/26</a:t>
             </a:fld>
             <a:endParaRPr lang="en-US"/>
           </a:p>
@@ -688,7 +698,7 @@
           <a:p>
             <a:fld id="{C1FF6DA9-008F-8B48-92A6-B652298478BF}" type="slidenum">
               <a:rPr lang="en-US" smtClean="0"/>
-              <a:t>‹#›</a:t>
+              <a:t>‹N°›</a:t>
             </a:fld>
             <a:endParaRPr lang="en-US"/>
           </a:p>
@@ -740,10 +750,9 @@
           <a:lstStyle/>
           <a:p>
             <a:r>
-              <a:rPr lang="en-US" smtClean="0"/>
+              <a:rPr lang="en-US"/>
               <a:t>Click to edit Master title style</a:t>
             </a:r>
-            <a:endParaRPr lang="en-US"/>
           </a:p>
         </p:txBody>
       </p:sp>
@@ -764,38 +773,37 @@
           <a:p>
             <a:pPr lvl="0"/>
             <a:r>
-              <a:rPr lang="en-US" smtClean="0"/>
+              <a:rPr lang="en-US"/>
               <a:t>Click to edit Master text styles</a:t>
             </a:r>
           </a:p>
           <a:p>
             <a:pPr lvl="1"/>
             <a:r>
-              <a:rPr lang="en-US" smtClean="0"/>
+              <a:rPr lang="en-US"/>
               <a:t>Second level</a:t>
             </a:r>
           </a:p>
           <a:p>
             <a:pPr lvl="2"/>
             <a:r>
-              <a:rPr lang="en-US" smtClean="0"/>
+              <a:rPr lang="en-US"/>
               <a:t>Third level</a:t>
             </a:r>
           </a:p>
           <a:p>
             <a:pPr lvl="3"/>
             <a:r>
-              <a:rPr lang="en-US" smtClean="0"/>
+              <a:rPr lang="en-US"/>
               <a:t>Fourth level</a:t>
             </a:r>
           </a:p>
           <a:p>
             <a:pPr lvl="4"/>
             <a:r>
-              <a:rPr lang="en-US" smtClean="0"/>
+              <a:rPr lang="en-US"/>
               <a:t>Fifth level</a:t>
             </a:r>
-            <a:endParaRPr lang="en-US"/>
           </a:p>
         </p:txBody>
       </p:sp>
@@ -816,7 +824,7 @@
           <a:p>
             <a:fld id="{5BCAD085-E8A6-8845-BD4E-CB4CCA059FC4}" type="datetimeFigureOut">
               <a:rPr lang="en-US" smtClean="0"/>
-              <a:t>1/27/13</a:t>
+              <a:t>9/3/26</a:t>
             </a:fld>
             <a:endParaRPr lang="en-US"/>
           </a:p>
@@ -858,7 +866,7 @@
           <a:p>
             <a:fld id="{C1FF6DA9-008F-8B48-92A6-B652298478BF}" type="slidenum">
               <a:rPr lang="en-US" smtClean="0"/>
-              <a:t>‹#›</a:t>
+              <a:t>‹N°›</a:t>
             </a:fld>
             <a:endParaRPr lang="en-US"/>
           </a:p>
@@ -919,10 +927,9 @@
           </a:lstStyle>
           <a:p>
             <a:r>
-              <a:rPr lang="en-US" smtClean="0"/>
+              <a:rPr lang="en-US"/>
               <a:t>Click to edit Master title style</a:t>
             </a:r>
-            <a:endParaRPr lang="en-US"/>
           </a:p>
         </p:txBody>
       </p:sp>
@@ -1039,7 +1046,7 @@
           <a:p>
             <a:pPr lvl="0"/>
             <a:r>
-              <a:rPr lang="en-US" smtClean="0"/>
+              <a:rPr lang="en-US"/>
               <a:t>Click to edit Master text styles</a:t>
             </a:r>
           </a:p>
@@ -1062,7 +1069,7 @@
           <a:p>
             <a:fld id="{5BCAD085-E8A6-8845-BD4E-CB4CCA059FC4}" type="datetimeFigureOut">
               <a:rPr lang="en-US" smtClean="0"/>
-              <a:t>1/27/13</a:t>
+              <a:t>9/3/26</a:t>
             </a:fld>
             <a:endParaRPr lang="en-US"/>
           </a:p>
@@ -1104,7 +1111,7 @@
           <a:p>
             <a:fld id="{C1FF6DA9-008F-8B48-92A6-B652298478BF}" type="slidenum">
               <a:rPr lang="en-US" smtClean="0"/>
-              <a:t>‹#›</a:t>
+              <a:t>‹N°›</a:t>
             </a:fld>
             <a:endParaRPr lang="en-US"/>
           </a:p>
@@ -1156,10 +1163,9 @@
           <a:lstStyle/>
           <a:p>
             <a:r>
-              <a:rPr lang="en-US" smtClean="0"/>
+              <a:rPr lang="en-US"/>
               <a:t>Click to edit Master title style</a:t>
             </a:r>
-            <a:endParaRPr lang="en-US"/>
           </a:p>
         </p:txBody>
       </p:sp>
@@ -1213,38 +1219,37 @@
           <a:p>
             <a:pPr lvl="0"/>
             <a:r>
-              <a:rPr lang="en-US" smtClean="0"/>
+              <a:rPr lang="en-US"/>
               <a:t>Click to edit Master text styles</a:t>
             </a:r>
           </a:p>
           <a:p>
             <a:pPr lvl="1"/>
             <a:r>
-              <a:rPr lang="en-US" smtClean="0"/>
+              <a:rPr lang="en-US"/>
               <a:t>Second level</a:t>
             </a:r>
           </a:p>
           <a:p>
             <a:pPr lvl="2"/>
             <a:r>
-              <a:rPr lang="en-US" smtClean="0"/>
+              <a:rPr lang="en-US"/>
               <a:t>Third level</a:t>
             </a:r>
           </a:p>
           <a:p>
             <a:pPr lvl="3"/>
             <a:r>
-              <a:rPr lang="en-US" smtClean="0"/>
+              <a:rPr lang="en-US"/>
               <a:t>Fourth level</a:t>
             </a:r>
           </a:p>
           <a:p>
             <a:pPr lvl="4"/>
             <a:r>
-              <a:rPr lang="en-US" smtClean="0"/>
+              <a:rPr lang="en-US"/>
               <a:t>Fifth level</a:t>
             </a:r>
-            <a:endParaRPr lang="en-US"/>
           </a:p>
         </p:txBody>
       </p:sp>
@@ -1298,38 +1303,37 @@
           <a:p>
             <a:pPr lvl="0"/>
             <a:r>
-              <a:rPr lang="en-US" smtClean="0"/>
+              <a:rPr lang="en-US"/>
               <a:t>Click to edit Master text styles</a:t>
             </a:r>
           </a:p>
           <a:p>
             <a:pPr lvl="1"/>
             <a:r>
-              <a:rPr lang="en-US" smtClean="0"/>
+              <a:rPr lang="en-US"/>
               <a:t>Second level</a:t>
             </a:r>
           </a:p>
           <a:p>
             <a:pPr lvl="2"/>
             <a:r>
-              <a:rPr lang="en-US" smtClean="0"/>
+              <a:rPr lang="en-US"/>
               <a:t>Third level</a:t>
             </a:r>
           </a:p>
           <a:p>
             <a:pPr lvl="3"/>
             <a:r>
-              <a:rPr lang="en-US" smtClean="0"/>
+              <a:rPr lang="en-US"/>
               <a:t>Fourth level</a:t>
             </a:r>
           </a:p>
           <a:p>
             <a:pPr lvl="4"/>
             <a:r>
-              <a:rPr lang="en-US" smtClean="0"/>
+              <a:rPr lang="en-US"/>
               <a:t>Fifth level</a:t>
             </a:r>
-            <a:endParaRPr lang="en-US"/>
           </a:p>
         </p:txBody>
       </p:sp>
@@ -1350,7 +1354,7 @@
           <a:p>
             <a:fld id="{5BCAD085-E8A6-8845-BD4E-CB4CCA059FC4}" type="datetimeFigureOut">
               <a:rPr lang="en-US" smtClean="0"/>
-              <a:t>1/27/13</a:t>
+              <a:t>9/3/26</a:t>
             </a:fld>
             <a:endParaRPr lang="en-US"/>
           </a:p>
@@ -1392,7 +1396,7 @@
           <a:p>
             <a:fld id="{C1FF6DA9-008F-8B48-92A6-B652298478BF}" type="slidenum">
               <a:rPr lang="en-US" smtClean="0"/>
-              <a:t>‹#›</a:t>
+              <a:t>‹N°›</a:t>
             </a:fld>
             <a:endParaRPr lang="en-US"/>
           </a:p>
@@ -1448,10 +1452,9 @@
           </a:lstStyle>
           <a:p>
             <a:r>
-              <a:rPr lang="en-US" smtClean="0"/>
+              <a:rPr lang="en-US"/>
               <a:t>Click to edit Master title style</a:t>
             </a:r>
-            <a:endParaRPr lang="en-US"/>
           </a:p>
         </p:txBody>
       </p:sp>
@@ -1514,7 +1517,7 @@
           <a:p>
             <a:pPr lvl="0"/>
             <a:r>
-              <a:rPr lang="en-US" smtClean="0"/>
+              <a:rPr lang="en-US"/>
               <a:t>Click to edit Master text styles</a:t>
             </a:r>
           </a:p>
@@ -1570,38 +1573,37 @@
           <a:p>
             <a:pPr lvl="0"/>
             <a:r>
-              <a:rPr lang="en-US" smtClean="0"/>
+              <a:rPr lang="en-US"/>
               <a:t>Click to edit Master text styles</a:t>
             </a:r>
           </a:p>
           <a:p>
             <a:pPr lvl="1"/>
             <a:r>
-              <a:rPr lang="en-US" smtClean="0"/>
+              <a:rPr lang="en-US"/>
               <a:t>Second level</a:t>
             </a:r>
           </a:p>
           <a:p>
             <a:pPr lvl="2"/>
             <a:r>
-              <a:rPr lang="en-US" smtClean="0"/>
+              <a:rPr lang="en-US"/>
               <a:t>Third level</a:t>
             </a:r>
           </a:p>
           <a:p>
             <a:pPr lvl="3"/>
             <a:r>
-              <a:rPr lang="en-US" smtClean="0"/>
+              <a:rPr lang="en-US"/>
               <a:t>Fourth level</a:t>
             </a:r>
           </a:p>
           <a:p>
             <a:pPr lvl="4"/>
             <a:r>
-              <a:rPr lang="en-US" smtClean="0"/>
+              <a:rPr lang="en-US"/>
               <a:t>Fifth level</a:t>
             </a:r>
-            <a:endParaRPr lang="en-US"/>
           </a:p>
         </p:txBody>
       </p:sp>
@@ -1664,7 +1666,7 @@
           <a:p>
             <a:pPr lvl="0"/>
             <a:r>
-              <a:rPr lang="en-US" smtClean="0"/>
+              <a:rPr lang="en-US"/>
               <a:t>Click to edit Master text styles</a:t>
             </a:r>
           </a:p>
@@ -1720,38 +1722,37 @@
           <a:p>
             <a:pPr lvl="0"/>
             <a:r>
-              <a:rPr lang="en-US" smtClean="0"/>
+              <a:rPr lang="en-US"/>
               <a:t>Click to edit Master text styles</a:t>
             </a:r>
           </a:p>
           <a:p>
             <a:pPr lvl="1"/>
             <a:r>
-              <a:rPr lang="en-US" smtClean="0"/>
+              <a:rPr lang="en-US"/>
               <a:t>Second level</a:t>
             </a:r>
           </a:p>
           <a:p>
             <a:pPr lvl="2"/>
             <a:r>
-              <a:rPr lang="en-US" smtClean="0"/>
+              <a:rPr lang="en-US"/>
               <a:t>Third level</a:t>
             </a:r>
           </a:p>
           <a:p>
             <a:pPr lvl="3"/>
             <a:r>
-              <a:rPr lang="en-US" smtClean="0"/>
+              <a:rPr lang="en-US"/>
               <a:t>Fourth level</a:t>
             </a:r>
           </a:p>
           <a:p>
             <a:pPr lvl="4"/>
             <a:r>
-              <a:rPr lang="en-US" smtClean="0"/>
+              <a:rPr lang="en-US"/>
               <a:t>Fifth level</a:t>
             </a:r>
-            <a:endParaRPr lang="en-US"/>
           </a:p>
         </p:txBody>
       </p:sp>
@@ -1772,7 +1773,7 @@
           <a:p>
             <a:fld id="{5BCAD085-E8A6-8845-BD4E-CB4CCA059FC4}" type="datetimeFigureOut">
               <a:rPr lang="en-US" smtClean="0"/>
-              <a:t>1/27/13</a:t>
+              <a:t>9/3/26</a:t>
             </a:fld>
             <a:endParaRPr lang="en-US"/>
           </a:p>
@@ -1814,7 +1815,7 @@
           <a:p>
             <a:fld id="{C1FF6DA9-008F-8B48-92A6-B652298478BF}" type="slidenum">
               <a:rPr lang="en-US" smtClean="0"/>
-              <a:t>‹#›</a:t>
+              <a:t>‹N°›</a:t>
             </a:fld>
             <a:endParaRPr lang="en-US"/>
           </a:p>
@@ -1866,10 +1867,9 @@
           <a:lstStyle/>
           <a:p>
             <a:r>
-              <a:rPr lang="en-US" smtClean="0"/>
+              <a:rPr lang="en-US"/>
               <a:t>Click to edit Master title style</a:t>
             </a:r>
-            <a:endParaRPr lang="en-US"/>
           </a:p>
         </p:txBody>
       </p:sp>
@@ -1890,7 +1890,7 @@
           <a:p>
             <a:fld id="{5BCAD085-E8A6-8845-BD4E-CB4CCA059FC4}" type="datetimeFigureOut">
               <a:rPr lang="en-US" smtClean="0"/>
-              <a:t>1/27/13</a:t>
+              <a:t>9/3/26</a:t>
             </a:fld>
             <a:endParaRPr lang="en-US"/>
           </a:p>
@@ -1932,7 +1932,7 @@
           <a:p>
             <a:fld id="{C1FF6DA9-008F-8B48-92A6-B652298478BF}" type="slidenum">
               <a:rPr lang="en-US" smtClean="0"/>
-              <a:t>‹#›</a:t>
+              <a:t>‹N°›</a:t>
             </a:fld>
             <a:endParaRPr lang="en-US"/>
           </a:p>
@@ -1985,7 +1985,7 @@
           <a:p>
             <a:fld id="{5BCAD085-E8A6-8845-BD4E-CB4CCA059FC4}" type="datetimeFigureOut">
               <a:rPr lang="en-US" smtClean="0"/>
-              <a:t>1/27/13</a:t>
+              <a:t>9/3/26</a:t>
             </a:fld>
             <a:endParaRPr lang="en-US"/>
           </a:p>
@@ -2027,7 +2027,7 @@
           <a:p>
             <a:fld id="{C1FF6DA9-008F-8B48-92A6-B652298478BF}" type="slidenum">
               <a:rPr lang="en-US" smtClean="0"/>
-              <a:t>‹#›</a:t>
+              <a:t>‹N°›</a:t>
             </a:fld>
             <a:endParaRPr lang="en-US"/>
           </a:p>
@@ -2088,10 +2088,9 @@
           </a:lstStyle>
           <a:p>
             <a:r>
-              <a:rPr lang="en-US" smtClean="0"/>
+              <a:rPr lang="en-US"/>
               <a:t>Click to edit Master title style</a:t>
             </a:r>
-            <a:endParaRPr lang="en-US"/>
           </a:p>
         </p:txBody>
       </p:sp>
@@ -2145,38 +2144,37 @@
           <a:p>
             <a:pPr lvl="0"/>
             <a:r>
-              <a:rPr lang="en-US" smtClean="0"/>
+              <a:rPr lang="en-US"/>
               <a:t>Click to edit Master text styles</a:t>
             </a:r>
           </a:p>
           <a:p>
             <a:pPr lvl="1"/>
             <a:r>
-              <a:rPr lang="en-US" smtClean="0"/>
+              <a:rPr lang="en-US"/>
               <a:t>Second level</a:t>
             </a:r>
           </a:p>
           <a:p>
             <a:pPr lvl="2"/>
             <a:r>
-              <a:rPr lang="en-US" smtClean="0"/>
+              <a:rPr lang="en-US"/>
               <a:t>Third level</a:t>
             </a:r>
           </a:p>
           <a:p>
             <a:pPr lvl="3"/>
             <a:r>
-              <a:rPr lang="en-US" smtClean="0"/>
+              <a:rPr lang="en-US"/>
               <a:t>Fourth level</a:t>
             </a:r>
           </a:p>
           <a:p>
             <a:pPr lvl="4"/>
             <a:r>
-              <a:rPr lang="en-US" smtClean="0"/>
+              <a:rPr lang="en-US"/>
               <a:t>Fifth level</a:t>
             </a:r>
-            <a:endParaRPr lang="en-US"/>
           </a:p>
         </p:txBody>
       </p:sp>
@@ -2239,7 +2237,7 @@
           <a:p>
             <a:pPr lvl="0"/>
             <a:r>
-              <a:rPr lang="en-US" smtClean="0"/>
+              <a:rPr lang="en-US"/>
               <a:t>Click to edit Master text styles</a:t>
             </a:r>
           </a:p>
@@ -2262,7 +2260,7 @@
           <a:p>
             <a:fld id="{5BCAD085-E8A6-8845-BD4E-CB4CCA059FC4}" type="datetimeFigureOut">
               <a:rPr lang="en-US" smtClean="0"/>
-              <a:t>1/27/13</a:t>
+              <a:t>9/3/26</a:t>
             </a:fld>
             <a:endParaRPr lang="en-US"/>
           </a:p>
@@ -2304,7 +2302,7 @@
           <a:p>
             <a:fld id="{C1FF6DA9-008F-8B48-92A6-B652298478BF}" type="slidenum">
               <a:rPr lang="en-US" smtClean="0"/>
-              <a:t>‹#›</a:t>
+              <a:t>‹N°›</a:t>
             </a:fld>
             <a:endParaRPr lang="en-US"/>
           </a:p>
@@ -2365,10 +2363,9 @@
           </a:lstStyle>
           <a:p>
             <a:r>
-              <a:rPr lang="en-US" smtClean="0"/>
+              <a:rPr lang="en-US"/>
               <a:t>Click to edit Master title style</a:t>
             </a:r>
-            <a:endParaRPr lang="en-US"/>
           </a:p>
         </p:txBody>
       </p:sp>
@@ -2492,7 +2489,7 @@
           <a:p>
             <a:pPr lvl="0"/>
             <a:r>
-              <a:rPr lang="en-US" smtClean="0"/>
+              <a:rPr lang="en-US"/>
               <a:t>Click to edit Master text styles</a:t>
             </a:r>
           </a:p>
@@ -2515,7 +2512,7 @@
           <a:p>
             <a:fld id="{5BCAD085-E8A6-8845-BD4E-CB4CCA059FC4}" type="datetimeFigureOut">
               <a:rPr lang="en-US" smtClean="0"/>
-              <a:t>1/27/13</a:t>
+              <a:t>9/3/26</a:t>
             </a:fld>
             <a:endParaRPr lang="en-US"/>
           </a:p>
@@ -2557,7 +2554,7 @@
           <a:p>
             <a:fld id="{C1FF6DA9-008F-8B48-92A6-B652298478BF}" type="slidenum">
               <a:rPr lang="en-US" smtClean="0"/>
-              <a:t>‹#›</a:t>
+              <a:t>‹N°›</a:t>
             </a:fld>
             <a:endParaRPr lang="en-US"/>
           </a:p>
@@ -2624,10 +2621,9 @@
           <a:lstStyle/>
           <a:p>
             <a:r>
-              <a:rPr lang="en-US" smtClean="0"/>
+              <a:rPr lang="en-US"/>
               <a:t>Click to edit Master title style</a:t>
             </a:r>
-            <a:endParaRPr lang="en-US"/>
           </a:p>
         </p:txBody>
       </p:sp>
@@ -2658,38 +2654,37 @@
           <a:p>
             <a:pPr lvl="0"/>
             <a:r>
-              <a:rPr lang="en-US" smtClean="0"/>
+              <a:rPr lang="en-US"/>
               <a:t>Click to edit Master text styles</a:t>
             </a:r>
           </a:p>
           <a:p>
             <a:pPr lvl="1"/>
             <a:r>
-              <a:rPr lang="en-US" smtClean="0"/>
+              <a:rPr lang="en-US"/>
               <a:t>Second level</a:t>
             </a:r>
           </a:p>
           <a:p>
             <a:pPr lvl="2"/>
             <a:r>
-              <a:rPr lang="en-US" smtClean="0"/>
+              <a:rPr lang="en-US"/>
               <a:t>Third level</a:t>
             </a:r>
           </a:p>
           <a:p>
             <a:pPr lvl="3"/>
             <a:r>
-              <a:rPr lang="en-US" smtClean="0"/>
+              <a:rPr lang="en-US"/>
               <a:t>Fourth level</a:t>
             </a:r>
           </a:p>
           <a:p>
             <a:pPr lvl="4"/>
             <a:r>
-              <a:rPr lang="en-US" smtClean="0"/>
+              <a:rPr lang="en-US"/>
               <a:t>Fifth level</a:t>
             </a:r>
-            <a:endParaRPr lang="en-US"/>
           </a:p>
         </p:txBody>
       </p:sp>
@@ -2728,7 +2723,7 @@
           <a:p>
             <a:fld id="{5BCAD085-E8A6-8845-BD4E-CB4CCA059FC4}" type="datetimeFigureOut">
               <a:rPr lang="en-US" smtClean="0"/>
-              <a:t>1/27/13</a:t>
+              <a:t>9/3/26</a:t>
             </a:fld>
             <a:endParaRPr lang="en-US"/>
           </a:p>
@@ -2806,7 +2801,7 @@
           <a:p>
             <a:fld id="{C1FF6DA9-008F-8B48-92A6-B652298478BF}" type="slidenum">
               <a:rPr lang="en-US" smtClean="0"/>
-              <a:t>‹#›</a:t>
+              <a:t>‹N°›</a:t>
             </a:fld>
             <a:endParaRPr lang="en-US"/>
           </a:p>
@@ -3087,7 +3082,7 @@
 </file>
 
 <file path=ppt/slides/slide1.xml><?xml version="1.0" encoding="utf-8"?>
-<p:sld xmlns:a="http://schemas.openxmlformats.org/drawingml/2006/main" xmlns:p="http://schemas.openxmlformats.org/presentationml/2006/main" xmlns:r="http://schemas.openxmlformats.org/officeDocument/2006/relationships">
+<p:sld xmlns:a="http://schemas.openxmlformats.org/drawingml/2006/main" xmlns:r="http://schemas.openxmlformats.org/officeDocument/2006/relationships" xmlns:p="http://schemas.openxmlformats.org/presentationml/2006/main">
   <p:cSld>
     <p:spTree>
       <p:nvGrpSpPr>
@@ -3095,7 +3090,14 @@
         <p:cNvGrpSpPr/>
         <p:nvPr/>
       </p:nvGrpSpPr>
-      <p:grpSpPr/>
+      <p:grpSpPr>
+        <a:xfrm>
+          <a:off x="0" y="0"/>
+          <a:ext cx="0" cy="0"/>
+          <a:chOff x="0" y="0"/>
+          <a:chExt cx="0" cy="0"/>
+        </a:xfrm>
+      </p:grpSpPr>
       <p:sp>
         <p:nvSpPr>
           <p:cNvPr id="2" name="Rectangle 1"/>
@@ -3137,6 +3139,7 @@
           <a:lstStyle/>
           <a:p>
             <a:pPr algn="ctr"/>
+            <a:endParaRPr/>
           </a:p>
         </p:txBody>
       </p:sp>
@@ -3157,7 +3160,7 @@
           <a:noFill/>
         </p:spPr>
         <p:txBody>
-          <a:bodyPr wrap="square" lIns="0" rIns="0" tIns="0" bIns="0">
+          <a:bodyPr wrap="square" lIns="0" tIns="0" rIns="0" bIns="0">
             <a:spAutoFit/>
           </a:bodyPr>
           <a:lstStyle/>
@@ -3208,7 +3211,7 @@
           <a:noFill/>
         </p:spPr>
         <p:txBody>
-          <a:bodyPr wrap="square" lIns="0" rIns="0" tIns="0" bIns="0">
+          <a:bodyPr wrap="square" lIns="0" tIns="0" rIns="0" bIns="0">
             <a:spAutoFit/>
           </a:bodyPr>
           <a:lstStyle/>
@@ -3274,6 +3277,7 @@
           <a:lstStyle/>
           <a:p>
             <a:pPr algn="ctr"/>
+            <a:endParaRPr/>
           </a:p>
         </p:txBody>
       </p:sp>
@@ -3294,7 +3298,7 @@
           <a:noFill/>
         </p:spPr>
         <p:txBody>
-          <a:bodyPr wrap="square" lIns="0" rIns="0" tIns="0" bIns="0">
+          <a:bodyPr wrap="square" lIns="0" tIns="0" rIns="0" bIns="0">
             <a:spAutoFit/>
           </a:bodyPr>
           <a:lstStyle/>
@@ -3371,7 +3375,7 @@
 </file>
 
 <file path=ppt/slides/slide2.xml><?xml version="1.0" encoding="utf-8"?>
-<p:sld xmlns:a="http://schemas.openxmlformats.org/drawingml/2006/main" xmlns:p="http://schemas.openxmlformats.org/presentationml/2006/main" xmlns:r="http://schemas.openxmlformats.org/officeDocument/2006/relationships">
+<p:sld xmlns:a="http://schemas.openxmlformats.org/drawingml/2006/main" xmlns:r="http://schemas.openxmlformats.org/officeDocument/2006/relationships" xmlns:p="http://schemas.openxmlformats.org/presentationml/2006/main">
   <p:cSld>
     <p:spTree>
       <p:nvGrpSpPr>
@@ -3379,7 +3383,14 @@
         <p:cNvGrpSpPr/>
         <p:nvPr/>
       </p:nvGrpSpPr>
-      <p:grpSpPr/>
+      <p:grpSpPr>
+        <a:xfrm>
+          <a:off x="0" y="0"/>
+          <a:ext cx="0" cy="0"/>
+          <a:chOff x="0" y="0"/>
+          <a:chExt cx="0" cy="0"/>
+        </a:xfrm>
+      </p:grpSpPr>
       <p:sp>
         <p:nvSpPr>
           <p:cNvPr id="2" name="Rectangle 1"/>
@@ -3421,6 +3432,7 @@
           <a:lstStyle/>
           <a:p>
             <a:pPr algn="ctr"/>
+            <a:endParaRPr/>
           </a:p>
         </p:txBody>
       </p:sp>
@@ -3441,7 +3453,7 @@
           <a:noFill/>
         </p:spPr>
         <p:txBody>
-          <a:bodyPr wrap="square" lIns="0" rIns="0" tIns="0" bIns="0">
+          <a:bodyPr wrap="square" lIns="0" tIns="0" rIns="0" bIns="0">
             <a:spAutoFit/>
           </a:bodyPr>
           <a:lstStyle/>
@@ -3507,7 +3519,7 @@
           <a:noFill/>
         </p:spPr>
         <p:txBody>
-          <a:bodyPr wrap="square" lIns="0" rIns="0" tIns="0" bIns="0">
+          <a:bodyPr wrap="square" lIns="0" tIns="0" rIns="0" bIns="0">
             <a:spAutoFit/>
           </a:bodyPr>
           <a:lstStyle/>
@@ -3550,7 +3562,7 @@
           <a:noFill/>
         </p:spPr>
         <p:txBody>
-          <a:bodyPr wrap="square" lIns="0" rIns="0" tIns="0" bIns="0">
+          <a:bodyPr wrap="square" lIns="0" tIns="0" rIns="0" bIns="0">
             <a:spAutoFit/>
           </a:bodyPr>
           <a:lstStyle/>
@@ -3592,7 +3604,7 @@
           <a:noFill/>
         </p:spPr>
         <p:txBody>
-          <a:bodyPr wrap="square" lIns="0" rIns="0" tIns="0" bIns="0">
+          <a:bodyPr wrap="square" lIns="0" tIns="0" rIns="0" bIns="0">
             <a:spAutoFit/>
           </a:bodyPr>
           <a:lstStyle/>
@@ -3634,7 +3646,7 @@
           <a:noFill/>
         </p:spPr>
         <p:txBody>
-          <a:bodyPr wrap="square" lIns="0" rIns="0" tIns="0" bIns="0">
+          <a:bodyPr wrap="square" lIns="0" tIns="0" rIns="0" bIns="0">
             <a:spAutoFit/>
           </a:bodyPr>
           <a:lstStyle/>
@@ -3700,6 +3712,7 @@
           <a:lstStyle/>
           <a:p>
             <a:pPr algn="ctr"/>
+            <a:endParaRPr/>
           </a:p>
         </p:txBody>
       </p:sp>
@@ -3744,6 +3757,7 @@
           <a:lstStyle/>
           <a:p>
             <a:pPr algn="ctr"/>
+            <a:endParaRPr/>
           </a:p>
         </p:txBody>
       </p:sp>
@@ -3764,7 +3778,7 @@
           <a:noFill/>
         </p:spPr>
         <p:txBody>
-          <a:bodyPr wrap="square" lIns="0" rIns="0" tIns="0" bIns="0">
+          <a:bodyPr wrap="square" lIns="0" tIns="0" rIns="0" bIns="0">
             <a:spAutoFit/>
           </a:bodyPr>
           <a:lstStyle/>
@@ -3857,6 +3871,7 @@
           <a:lstStyle/>
           <a:p>
             <a:pPr algn="ctr"/>
+            <a:endParaRPr/>
           </a:p>
         </p:txBody>
       </p:sp>
@@ -3901,6 +3916,7 @@
           <a:lstStyle/>
           <a:p>
             <a:pPr algn="ctr"/>
+            <a:endParaRPr/>
           </a:p>
         </p:txBody>
       </p:sp>
@@ -3921,7 +3937,7 @@
           <a:noFill/>
         </p:spPr>
         <p:txBody>
-          <a:bodyPr wrap="square" lIns="0" rIns="0" tIns="0" bIns="0">
+          <a:bodyPr wrap="square" lIns="0" tIns="0" rIns="0" bIns="0">
             <a:spAutoFit/>
           </a:bodyPr>
           <a:lstStyle/>
@@ -3935,7 +3951,7 @@
               </a:spcAft>
             </a:pPr>
             <a:r>
-              <a:rPr sz="3000" b="1" i="0">
+              <a:rPr sz="3000" b="1" i="0" dirty="0">
                 <a:solidFill>
                   <a:srgbClr val="2E4372"/>
                 </a:solidFill>
@@ -3954,8 +3970,8 @@
         </p:nvSpPr>
         <p:spPr>
           <a:xfrm>
-            <a:off x="658368" y="3255264"/>
-            <a:ext cx="1539240" cy="329184"/>
+            <a:off x="560832" y="3255264"/>
+            <a:ext cx="1783080" cy="429156"/>
           </a:xfrm>
           <a:prstGeom prst="rect">
             <a:avLst/>
@@ -3963,7 +3979,7 @@
           <a:noFill/>
         </p:spPr>
         <p:txBody>
-          <a:bodyPr wrap="square" lIns="0" rIns="0" tIns="0" bIns="0">
+          <a:bodyPr wrap="square" lIns="0" tIns="0" rIns="0" bIns="0">
             <a:spAutoFit/>
           </a:bodyPr>
           <a:lstStyle/>
@@ -3977,7 +3993,7 @@
               </a:spcAft>
             </a:pPr>
             <a:r>
-              <a:rPr sz="1050" b="0" i="0">
+              <a:rPr sz="1050" b="0" i="0" dirty="0">
                 <a:solidFill>
                   <a:srgbClr val="5B6577"/>
                 </a:solidFill>
@@ -4030,6 +4046,7 @@
           <a:lstStyle/>
           <a:p>
             <a:pPr algn="ctr"/>
+            <a:endParaRPr/>
           </a:p>
         </p:txBody>
       </p:sp>
@@ -4074,6 +4091,7 @@
           <a:lstStyle/>
           <a:p>
             <a:pPr algn="ctr"/>
+            <a:endParaRPr/>
           </a:p>
         </p:txBody>
       </p:sp>
@@ -4094,7 +4112,7 @@
           <a:noFill/>
         </p:spPr>
         <p:txBody>
-          <a:bodyPr wrap="square" lIns="0" rIns="0" tIns="0" bIns="0">
+          <a:bodyPr wrap="square" lIns="0" tIns="0" rIns="0" bIns="0">
             <a:spAutoFit/>
           </a:bodyPr>
           <a:lstStyle/>
@@ -4136,7 +4154,7 @@
           <a:noFill/>
         </p:spPr>
         <p:txBody>
-          <a:bodyPr wrap="square" lIns="0" rIns="0" tIns="0" bIns="0">
+          <a:bodyPr wrap="square" lIns="0" tIns="0" rIns="0" bIns="0">
             <a:spAutoFit/>
           </a:bodyPr>
           <a:lstStyle/>
@@ -4150,7 +4168,7 @@
               </a:spcAft>
             </a:pPr>
             <a:r>
-              <a:rPr sz="1050" b="0" i="0">
+              <a:rPr sz="1050" b="0" i="0" dirty="0">
                 <a:solidFill>
                   <a:srgbClr val="5B6577"/>
                 </a:solidFill>
@@ -4203,6 +4221,7 @@
           <a:lstStyle/>
           <a:p>
             <a:pPr algn="ctr"/>
+            <a:endParaRPr/>
           </a:p>
         </p:txBody>
       </p:sp>
@@ -4247,6 +4266,7 @@
           <a:lstStyle/>
           <a:p>
             <a:pPr algn="ctr"/>
+            <a:endParaRPr/>
           </a:p>
         </p:txBody>
       </p:sp>
@@ -4267,7 +4287,7 @@
           <a:noFill/>
         </p:spPr>
         <p:txBody>
-          <a:bodyPr wrap="square" lIns="0" rIns="0" tIns="0" bIns="0">
+          <a:bodyPr wrap="square" lIns="0" tIns="0" rIns="0" bIns="0">
             <a:spAutoFit/>
           </a:bodyPr>
           <a:lstStyle/>
@@ -4301,7 +4321,7 @@
         <p:spPr>
           <a:xfrm>
             <a:off x="4395216" y="3255264"/>
-            <a:ext cx="1539240" cy="329184"/>
+            <a:ext cx="1630680" cy="429156"/>
           </a:xfrm>
           <a:prstGeom prst="rect">
             <a:avLst/>
@@ -4309,7 +4329,7 @@
           <a:noFill/>
         </p:spPr>
         <p:txBody>
-          <a:bodyPr wrap="square" lIns="0" rIns="0" tIns="0" bIns="0">
+          <a:bodyPr wrap="square" lIns="0" tIns="0" rIns="0" bIns="0">
             <a:spAutoFit/>
           </a:bodyPr>
           <a:lstStyle/>
@@ -4323,7 +4343,7 @@
               </a:spcAft>
             </a:pPr>
             <a:r>
-              <a:rPr sz="1050" b="0" i="0">
+              <a:rPr sz="1050" b="0" i="0" dirty="0">
                 <a:solidFill>
                   <a:srgbClr val="5B6577"/>
                 </a:solidFill>
@@ -4376,6 +4396,7 @@
           <a:lstStyle/>
           <a:p>
             <a:pPr algn="ctr"/>
+            <a:endParaRPr/>
           </a:p>
         </p:txBody>
       </p:sp>
@@ -4420,6 +4441,7 @@
           <a:lstStyle/>
           <a:p>
             <a:pPr algn="ctr"/>
+            <a:endParaRPr/>
           </a:p>
         </p:txBody>
       </p:sp>
@@ -4440,7 +4462,7 @@
           <a:noFill/>
         </p:spPr>
         <p:txBody>
-          <a:bodyPr wrap="square" lIns="0" rIns="0" tIns="0" bIns="0">
+          <a:bodyPr wrap="square" lIns="0" tIns="0" rIns="0" bIns="0">
             <a:spAutoFit/>
           </a:bodyPr>
           <a:lstStyle/>
@@ -4482,7 +4504,7 @@
           <a:noFill/>
         </p:spPr>
         <p:txBody>
-          <a:bodyPr wrap="square" lIns="0" rIns="0" tIns="0" bIns="0">
+          <a:bodyPr wrap="square" lIns="0" tIns="0" rIns="0" bIns="0">
             <a:spAutoFit/>
           </a:bodyPr>
           <a:lstStyle/>
@@ -4549,6 +4571,7 @@
           <a:lstStyle/>
           <a:p>
             <a:pPr algn="ctr"/>
+            <a:endParaRPr/>
           </a:p>
         </p:txBody>
       </p:sp>
@@ -4593,6 +4616,7 @@
           <a:lstStyle/>
           <a:p>
             <a:pPr algn="ctr"/>
+            <a:endParaRPr/>
           </a:p>
         </p:txBody>
       </p:sp>
@@ -4613,7 +4637,7 @@
           <a:noFill/>
         </p:spPr>
         <p:txBody>
-          <a:bodyPr wrap="square" lIns="0" rIns="0" tIns="0" bIns="0">
+          <a:bodyPr wrap="square" lIns="0" tIns="0" rIns="0" bIns="0">
             <a:spAutoFit/>
           </a:bodyPr>
           <a:lstStyle/>
@@ -4655,7 +4679,7 @@
           <a:noFill/>
         </p:spPr>
         <p:txBody>
-          <a:bodyPr wrap="square" lIns="0" rIns="0" tIns="0" bIns="0">
+          <a:bodyPr wrap="square" lIns="0" tIns="0" rIns="0" bIns="0">
             <a:spAutoFit/>
           </a:bodyPr>
           <a:lstStyle/>
@@ -4669,7 +4693,7 @@
               </a:spcAft>
             </a:pPr>
             <a:r>
-              <a:rPr sz="1050" b="0" i="0">
+              <a:rPr sz="1050" b="0" i="0" dirty="0">
                 <a:solidFill>
                   <a:srgbClr val="5B6577"/>
                 </a:solidFill>
@@ -4722,6 +4746,7 @@
           <a:lstStyle/>
           <a:p>
             <a:pPr algn="ctr"/>
+            <a:endParaRPr/>
           </a:p>
         </p:txBody>
       </p:sp>
@@ -4766,6 +4791,7 @@
           <a:lstStyle/>
           <a:p>
             <a:pPr algn="ctr"/>
+            <a:endParaRPr/>
           </a:p>
         </p:txBody>
       </p:sp>
@@ -4786,7 +4812,7 @@
           <a:noFill/>
         </p:spPr>
         <p:txBody>
-          <a:bodyPr wrap="square" lIns="0" rIns="0" tIns="0" bIns="0">
+          <a:bodyPr wrap="square" lIns="0" tIns="0" rIns="0" bIns="0">
             <a:spAutoFit/>
           </a:bodyPr>
           <a:lstStyle/>
@@ -4828,7 +4854,7 @@
           <a:noFill/>
         </p:spPr>
         <p:txBody>
-          <a:bodyPr wrap="square" lIns="0" rIns="0" tIns="0" bIns="0">
+          <a:bodyPr wrap="square" lIns="0" tIns="0" rIns="0" bIns="0">
             <a:spAutoFit/>
           </a:bodyPr>
           <a:lstStyle/>
@@ -4842,7 +4868,7 @@
               </a:spcAft>
             </a:pPr>
             <a:r>
-              <a:rPr sz="1050" b="0" i="0">
+              <a:rPr sz="1050" b="0" i="0" dirty="0">
                 <a:solidFill>
                   <a:srgbClr val="5B6577"/>
                 </a:solidFill>
@@ -4871,7 +4897,7 @@
           <a:noFill/>
         </p:spPr>
         <p:txBody>
-          <a:bodyPr wrap="square" lIns="0" rIns="0" tIns="0" bIns="0">
+          <a:bodyPr wrap="square" lIns="0" tIns="0" rIns="0" bIns="0">
             <a:spAutoFit/>
           </a:bodyPr>
           <a:lstStyle/>
@@ -4913,7 +4939,7 @@
           <a:noFill/>
         </p:spPr>
         <p:txBody>
-          <a:bodyPr wrap="square" lIns="0" rIns="0" tIns="0" bIns="0">
+          <a:bodyPr wrap="square" lIns="0" tIns="0" rIns="0" bIns="0">
             <a:spAutoFit/>
           </a:bodyPr>
           <a:lstStyle/>
@@ -4979,6 +5005,7 @@
           <a:lstStyle/>
           <a:p>
             <a:pPr algn="ctr"/>
+            <a:endParaRPr/>
           </a:p>
         </p:txBody>
       </p:sp>
@@ -5023,6 +5050,7 @@
           <a:lstStyle/>
           <a:p>
             <a:pPr algn="ctr"/>
+            <a:endParaRPr/>
           </a:p>
         </p:txBody>
       </p:sp>
@@ -5043,7 +5071,7 @@
           <a:noFill/>
         </p:spPr>
         <p:txBody>
-          <a:bodyPr wrap="square" lIns="0" rIns="0" tIns="0" bIns="0">
+          <a:bodyPr wrap="square" lIns="0" tIns="0" rIns="0" bIns="0">
             <a:spAutoFit/>
           </a:bodyPr>
           <a:lstStyle/>
@@ -5085,7 +5113,7 @@
           <a:noFill/>
         </p:spPr>
         <p:txBody>
-          <a:bodyPr wrap="square" lIns="0" rIns="0" tIns="0" bIns="0">
+          <a:bodyPr wrap="square" lIns="0" tIns="0" rIns="0" bIns="0">
             <a:spAutoFit/>
           </a:bodyPr>
           <a:lstStyle/>
@@ -5151,6 +5179,7 @@
           <a:lstStyle/>
           <a:p>
             <a:pPr algn="ctr"/>
+            <a:endParaRPr/>
           </a:p>
         </p:txBody>
       </p:sp>
@@ -5195,6 +5224,7 @@
           <a:lstStyle/>
           <a:p>
             <a:pPr algn="ctr"/>
+            <a:endParaRPr/>
           </a:p>
         </p:txBody>
       </p:sp>
@@ -5215,7 +5245,7 @@
           <a:noFill/>
         </p:spPr>
         <p:txBody>
-          <a:bodyPr wrap="square" lIns="0" rIns="0" tIns="0" bIns="0">
+          <a:bodyPr wrap="square" lIns="0" tIns="0" rIns="0" bIns="0">
             <a:spAutoFit/>
           </a:bodyPr>
           <a:lstStyle/>
@@ -5257,7 +5287,7 @@
           <a:noFill/>
         </p:spPr>
         <p:txBody>
-          <a:bodyPr wrap="square" lIns="0" rIns="0" tIns="0" bIns="0">
+          <a:bodyPr wrap="square" lIns="0" tIns="0" rIns="0" bIns="0">
             <a:spAutoFit/>
           </a:bodyPr>
           <a:lstStyle/>
@@ -5323,6 +5353,7 @@
           <a:lstStyle/>
           <a:p>
             <a:pPr algn="ctr"/>
+            <a:endParaRPr/>
           </a:p>
         </p:txBody>
       </p:sp>
@@ -5367,6 +5398,7 @@
           <a:lstStyle/>
           <a:p>
             <a:pPr algn="ctr"/>
+            <a:endParaRPr/>
           </a:p>
         </p:txBody>
       </p:sp>
@@ -5387,7 +5419,7 @@
           <a:noFill/>
         </p:spPr>
         <p:txBody>
-          <a:bodyPr wrap="square" lIns="0" rIns="0" tIns="0" bIns="0">
+          <a:bodyPr wrap="square" lIns="0" tIns="0" rIns="0" bIns="0">
             <a:spAutoFit/>
           </a:bodyPr>
           <a:lstStyle/>
@@ -5429,7 +5461,7 @@
           <a:noFill/>
         </p:spPr>
         <p:txBody>
-          <a:bodyPr wrap="square" lIns="0" rIns="0" tIns="0" bIns="0">
+          <a:bodyPr wrap="square" lIns="0" tIns="0" rIns="0" bIns="0">
             <a:spAutoFit/>
           </a:bodyPr>
           <a:lstStyle/>
@@ -5495,6 +5527,7 @@
           <a:lstStyle/>
           <a:p>
             <a:pPr algn="ctr"/>
+            <a:endParaRPr/>
           </a:p>
         </p:txBody>
       </p:sp>
@@ -5539,6 +5572,7 @@
           <a:lstStyle/>
           <a:p>
             <a:pPr algn="ctr"/>
+            <a:endParaRPr/>
           </a:p>
         </p:txBody>
       </p:sp>
@@ -5559,7 +5593,7 @@
           <a:noFill/>
         </p:spPr>
         <p:txBody>
-          <a:bodyPr wrap="square" lIns="0" rIns="0" tIns="0" bIns="0">
+          <a:bodyPr wrap="square" lIns="0" tIns="0" rIns="0" bIns="0">
             <a:spAutoFit/>
           </a:bodyPr>
           <a:lstStyle/>
@@ -5573,7 +5607,7 @@
               </a:spcAft>
             </a:pPr>
             <a:r>
-              <a:rPr sz="1350" b="1" i="0">
+              <a:rPr sz="1350" b="1" i="0" dirty="0">
                 <a:solidFill>
                   <a:srgbClr val="255C45"/>
                 </a:solidFill>
@@ -5582,13 +5616,49 @@
               <a:t>The chain is followable end to end. </a:t>
             </a:r>
             <a:r>
-              <a:rPr sz="1350" b="0" i="0">
+              <a:rPr sz="1350" b="0" i="0" dirty="0">
                 <a:solidFill>
                   <a:srgbClr val="262626"/>
                 </a:solidFill>
                 <a:latin typeface="Calibri"/>
               </a:rPr>
-              <a:t>era-lex holds 208,517 triples over 7,317 legal acts in ELI, and 420 ontology terms cite 79 acts through dcterms:source. A reuser goes from data field → numbered parameter → provision in the Official Journal with no human in the loop. This is the part most worth copying, and it is domain-neutral.</a:t>
+              <a:t>era-lex holds 208,517 triples over 7,317 legal acts in ELI, and 420 ontology terms cite 79 acts through </a:t>
+            </a:r>
+            <a:r>
+              <a:rPr sz="1350" b="0" i="0" dirty="0" err="1">
+                <a:solidFill>
+                  <a:srgbClr val="262626"/>
+                </a:solidFill>
+                <a:latin typeface="Calibri"/>
+              </a:rPr>
+              <a:t>dcterms:source</a:t>
+            </a:r>
+            <a:r>
+              <a:rPr sz="1350" b="0" i="0" dirty="0">
+                <a:solidFill>
+                  <a:srgbClr val="262626"/>
+                </a:solidFill>
+                <a:latin typeface="Calibri"/>
+              </a:rPr>
+              <a:t>. A </a:t>
+            </a:r>
+            <a:r>
+              <a:rPr sz="1350" b="0" i="0" dirty="0" err="1">
+                <a:solidFill>
+                  <a:srgbClr val="262626"/>
+                </a:solidFill>
+                <a:latin typeface="Calibri"/>
+              </a:rPr>
+              <a:t>reuser</a:t>
+            </a:r>
+            <a:r>
+              <a:rPr sz="1350" b="0" i="0" dirty="0">
+                <a:solidFill>
+                  <a:srgbClr val="262626"/>
+                </a:solidFill>
+                <a:latin typeface="Calibri"/>
+              </a:rPr>
+              <a:t> goes from data field → numbered parameter → provision in the Official Journal with no human in the loop. This is the part most worth copying, and it is domain-neutral.</a:t>
             </a:r>
           </a:p>
         </p:txBody>
@@ -5602,7 +5672,7 @@
 </file>
 
 <file path=ppt/slides/slide3.xml><?xml version="1.0" encoding="utf-8"?>
-<p:sld xmlns:a="http://schemas.openxmlformats.org/drawingml/2006/main" xmlns:p="http://schemas.openxmlformats.org/presentationml/2006/main" xmlns:r="http://schemas.openxmlformats.org/officeDocument/2006/relationships">
+<p:sld xmlns:a="http://schemas.openxmlformats.org/drawingml/2006/main" xmlns:r="http://schemas.openxmlformats.org/officeDocument/2006/relationships" xmlns:p="http://schemas.openxmlformats.org/presentationml/2006/main">
   <p:cSld>
     <p:spTree>
       <p:nvGrpSpPr>
@@ -5610,7 +5680,14 @@
         <p:cNvGrpSpPr/>
         <p:nvPr/>
       </p:nvGrpSpPr>
-      <p:grpSpPr/>
+      <p:grpSpPr>
+        <a:xfrm>
+          <a:off x="0" y="0"/>
+          <a:ext cx="0" cy="0"/>
+          <a:chOff x="0" y="0"/>
+          <a:chExt cx="0" cy="0"/>
+        </a:xfrm>
+      </p:grpSpPr>
       <p:sp>
         <p:nvSpPr>
           <p:cNvPr id="2" name="Rectangle 1"/>
@@ -5652,6 +5729,7 @@
           <a:lstStyle/>
           <a:p>
             <a:pPr algn="ctr"/>
+            <a:endParaRPr/>
           </a:p>
         </p:txBody>
       </p:sp>
@@ -5672,7 +5750,7 @@
           <a:noFill/>
         </p:spPr>
         <p:txBody>
-          <a:bodyPr wrap="square" lIns="0" rIns="0" tIns="0" bIns="0">
+          <a:bodyPr wrap="square" lIns="0" tIns="0" rIns="0" bIns="0">
             <a:spAutoFit/>
           </a:bodyPr>
           <a:lstStyle/>
@@ -5738,7 +5816,7 @@
           <a:noFill/>
         </p:spPr>
         <p:txBody>
-          <a:bodyPr wrap="square" lIns="0" rIns="0" tIns="0" bIns="0">
+          <a:bodyPr wrap="square" lIns="0" tIns="0" rIns="0" bIns="0">
             <a:spAutoFit/>
           </a:bodyPr>
           <a:lstStyle/>
@@ -5781,7 +5859,7 @@
           <a:noFill/>
         </p:spPr>
         <p:txBody>
-          <a:bodyPr wrap="square" lIns="0" rIns="0" tIns="0" bIns="0">
+          <a:bodyPr wrap="square" lIns="0" tIns="0" rIns="0" bIns="0">
             <a:spAutoFit/>
           </a:bodyPr>
           <a:lstStyle/>
@@ -5823,7 +5901,7 @@
           <a:noFill/>
         </p:spPr>
         <p:txBody>
-          <a:bodyPr wrap="square" lIns="0" rIns="0" tIns="0" bIns="0">
+          <a:bodyPr wrap="square" lIns="0" tIns="0" rIns="0" bIns="0">
             <a:spAutoFit/>
           </a:bodyPr>
           <a:lstStyle/>
@@ -5865,7 +5943,7 @@
           <a:noFill/>
         </p:spPr>
         <p:txBody>
-          <a:bodyPr wrap="square" lIns="0" rIns="0" tIns="0" bIns="0">
+          <a:bodyPr wrap="square" lIns="0" tIns="0" rIns="0" bIns="0">
             <a:spAutoFit/>
           </a:bodyPr>
           <a:lstStyle/>
@@ -5907,7 +5985,7 @@
           <a:noFill/>
         </p:spPr>
         <p:txBody>
-          <a:bodyPr wrap="square" lIns="0" rIns="0" tIns="0" bIns="0">
+          <a:bodyPr wrap="square" lIns="0" tIns="0" rIns="0" bIns="0">
             <a:spAutoFit/>
           </a:bodyPr>
           <a:lstStyle/>
@@ -5949,7 +6027,7 @@
           <a:noFill/>
         </p:spPr>
         <p:txBody>
-          <a:bodyPr wrap="square" lIns="0" rIns="0" tIns="0" bIns="0">
+          <a:bodyPr wrap="square" lIns="0" tIns="0" rIns="0" bIns="0">
             <a:spAutoFit/>
           </a:bodyPr>
           <a:lstStyle/>
@@ -6015,6 +6093,7 @@
           <a:lstStyle/>
           <a:p>
             <a:pPr algn="ctr"/>
+            <a:endParaRPr/>
           </a:p>
         </p:txBody>
       </p:sp>
@@ -6059,6 +6138,7 @@
           <a:lstStyle/>
           <a:p>
             <a:pPr algn="ctr"/>
+            <a:endParaRPr/>
           </a:p>
         </p:txBody>
       </p:sp>
@@ -6079,7 +6159,7 @@
           <a:noFill/>
         </p:spPr>
         <p:txBody>
-          <a:bodyPr wrap="square" lIns="0" rIns="0" tIns="0" bIns="0">
+          <a:bodyPr wrap="square" lIns="0" tIns="0" rIns="0" bIns="0">
             <a:spAutoFit/>
           </a:bodyPr>
           <a:lstStyle/>
@@ -6121,7 +6201,7 @@
           <a:noFill/>
         </p:spPr>
         <p:txBody>
-          <a:bodyPr wrap="square" lIns="0" rIns="0" tIns="0" bIns="0">
+          <a:bodyPr wrap="square" lIns="0" tIns="0" rIns="0" bIns="0">
             <a:spAutoFit/>
           </a:bodyPr>
           <a:lstStyle/>
@@ -6187,6 +6267,7 @@
           <a:lstStyle/>
           <a:p>
             <a:pPr algn="ctr"/>
+            <a:endParaRPr/>
           </a:p>
         </p:txBody>
       </p:sp>
@@ -6231,6 +6312,7 @@
           <a:lstStyle/>
           <a:p>
             <a:pPr algn="ctr"/>
+            <a:endParaRPr/>
           </a:p>
         </p:txBody>
       </p:sp>
@@ -6251,7 +6333,7 @@
           <a:noFill/>
         </p:spPr>
         <p:txBody>
-          <a:bodyPr wrap="square" lIns="0" rIns="0" tIns="0" bIns="0">
+          <a:bodyPr wrap="square" lIns="0" tIns="0" rIns="0" bIns="0">
             <a:spAutoFit/>
           </a:bodyPr>
           <a:lstStyle/>
@@ -6293,7 +6375,7 @@
           <a:noFill/>
         </p:spPr>
         <p:txBody>
-          <a:bodyPr wrap="square" lIns="0" rIns="0" tIns="0" bIns="0">
+          <a:bodyPr wrap="square" lIns="0" tIns="0" rIns="0" bIns="0">
             <a:spAutoFit/>
           </a:bodyPr>
           <a:lstStyle/>
@@ -6359,6 +6441,7 @@
           <a:lstStyle/>
           <a:p>
             <a:pPr algn="ctr"/>
+            <a:endParaRPr/>
           </a:p>
         </p:txBody>
       </p:sp>
@@ -6403,6 +6486,7 @@
           <a:lstStyle/>
           <a:p>
             <a:pPr algn="ctr"/>
+            <a:endParaRPr/>
           </a:p>
         </p:txBody>
       </p:sp>
@@ -6423,7 +6507,7 @@
           <a:noFill/>
         </p:spPr>
         <p:txBody>
-          <a:bodyPr wrap="square" lIns="0" rIns="0" tIns="0" bIns="0">
+          <a:bodyPr wrap="square" lIns="0" tIns="0" rIns="0" bIns="0">
             <a:spAutoFit/>
           </a:bodyPr>
           <a:lstStyle/>
@@ -6465,7 +6549,7 @@
           <a:noFill/>
         </p:spPr>
         <p:txBody>
-          <a:bodyPr wrap="square" lIns="0" rIns="0" tIns="0" bIns="0">
+          <a:bodyPr wrap="square" lIns="0" tIns="0" rIns="0" bIns="0">
             <a:spAutoFit/>
           </a:bodyPr>
           <a:lstStyle/>
@@ -6531,6 +6615,7 @@
           <a:lstStyle/>
           <a:p>
             <a:pPr algn="ctr"/>
+            <a:endParaRPr/>
           </a:p>
         </p:txBody>
       </p:sp>
@@ -6575,6 +6660,7 @@
           <a:lstStyle/>
           <a:p>
             <a:pPr algn="ctr"/>
+            <a:endParaRPr/>
           </a:p>
         </p:txBody>
       </p:sp>
@@ -6595,7 +6681,7 @@
           <a:noFill/>
         </p:spPr>
         <p:txBody>
-          <a:bodyPr wrap="square" lIns="0" rIns="0" tIns="0" bIns="0">
+          <a:bodyPr wrap="square" lIns="0" tIns="0" rIns="0" bIns="0">
             <a:spAutoFit/>
           </a:bodyPr>
           <a:lstStyle/>
@@ -6637,7 +6723,7 @@
           <a:noFill/>
         </p:spPr>
         <p:txBody>
-          <a:bodyPr wrap="square" lIns="0" rIns="0" tIns="0" bIns="0">
+          <a:bodyPr wrap="square" lIns="0" tIns="0" rIns="0" bIns="0">
             <a:spAutoFit/>
           </a:bodyPr>
           <a:lstStyle/>
@@ -6703,6 +6789,7 @@
           <a:lstStyle/>
           <a:p>
             <a:pPr algn="ctr"/>
+            <a:endParaRPr/>
           </a:p>
         </p:txBody>
       </p:sp>
@@ -6747,6 +6834,7 @@
           <a:lstStyle/>
           <a:p>
             <a:pPr algn="ctr"/>
+            <a:endParaRPr/>
           </a:p>
         </p:txBody>
       </p:sp>
@@ -6767,7 +6855,7 @@
           <a:noFill/>
         </p:spPr>
         <p:txBody>
-          <a:bodyPr wrap="square" lIns="0" rIns="0" tIns="0" bIns="0">
+          <a:bodyPr wrap="square" lIns="0" tIns="0" rIns="0" bIns="0">
             <a:spAutoFit/>
           </a:bodyPr>
           <a:lstStyle/>
@@ -6809,7 +6897,7 @@
           <a:noFill/>
         </p:spPr>
         <p:txBody>
-          <a:bodyPr wrap="square" lIns="0" rIns="0" tIns="0" bIns="0">
+          <a:bodyPr wrap="square" lIns="0" tIns="0" rIns="0" bIns="0">
             <a:spAutoFit/>
           </a:bodyPr>
           <a:lstStyle/>
@@ -6875,6 +6963,7 @@
           <a:lstStyle/>
           <a:p>
             <a:pPr algn="ctr"/>
+            <a:endParaRPr/>
           </a:p>
         </p:txBody>
       </p:sp>
@@ -6919,6 +7008,7 @@
           <a:lstStyle/>
           <a:p>
             <a:pPr algn="ctr"/>
+            <a:endParaRPr/>
           </a:p>
         </p:txBody>
       </p:sp>
@@ -6939,7 +7029,7 @@
           <a:noFill/>
         </p:spPr>
         <p:txBody>
-          <a:bodyPr wrap="square" lIns="0" rIns="0" tIns="0" bIns="0">
+          <a:bodyPr wrap="square" lIns="0" tIns="0" rIns="0" bIns="0">
             <a:spAutoFit/>
           </a:bodyPr>
           <a:lstStyle/>
@@ -6981,7 +7071,7 @@
           <a:noFill/>
         </p:spPr>
         <p:txBody>
-          <a:bodyPr wrap="square" lIns="0" rIns="0" tIns="0" bIns="0">
+          <a:bodyPr wrap="square" lIns="0" tIns="0" rIns="0" bIns="0">
             <a:spAutoFit/>
           </a:bodyPr>
           <a:lstStyle/>
@@ -7047,6 +7137,7 @@
           <a:lstStyle/>
           <a:p>
             <a:pPr algn="ctr"/>
+            <a:endParaRPr/>
           </a:p>
         </p:txBody>
       </p:sp>
@@ -7091,6 +7182,7 @@
           <a:lstStyle/>
           <a:p>
             <a:pPr algn="ctr"/>
+            <a:endParaRPr/>
           </a:p>
         </p:txBody>
       </p:sp>
@@ -7111,7 +7203,7 @@
           <a:noFill/>
         </p:spPr>
         <p:txBody>
-          <a:bodyPr wrap="square" lIns="0" rIns="0" tIns="0" bIns="0">
+          <a:bodyPr wrap="square" lIns="0" tIns="0" rIns="0" bIns="0">
             <a:spAutoFit/>
           </a:bodyPr>
           <a:lstStyle/>
@@ -7153,7 +7245,7 @@
           <a:noFill/>
         </p:spPr>
         <p:txBody>
-          <a:bodyPr wrap="square" lIns="0" rIns="0" tIns="0" bIns="0">
+          <a:bodyPr wrap="square" lIns="0" tIns="0" rIns="0" bIns="0">
             <a:spAutoFit/>
           </a:bodyPr>
           <a:lstStyle/>
@@ -7219,6 +7311,7 @@
           <a:lstStyle/>
           <a:p>
             <a:pPr algn="ctr"/>
+            <a:endParaRPr/>
           </a:p>
         </p:txBody>
       </p:sp>
@@ -7263,6 +7356,7 @@
           <a:lstStyle/>
           <a:p>
             <a:pPr algn="ctr"/>
+            <a:endParaRPr/>
           </a:p>
         </p:txBody>
       </p:sp>
@@ -7283,7 +7377,7 @@
           <a:noFill/>
         </p:spPr>
         <p:txBody>
-          <a:bodyPr wrap="square" lIns="0" rIns="0" tIns="0" bIns="0">
+          <a:bodyPr wrap="square" lIns="0" tIns="0" rIns="0" bIns="0">
             <a:spAutoFit/>
           </a:bodyPr>
           <a:lstStyle/>
@@ -7325,7 +7419,7 @@
           <a:noFill/>
         </p:spPr>
         <p:txBody>
-          <a:bodyPr wrap="square" lIns="0" rIns="0" tIns="0" bIns="0">
+          <a:bodyPr wrap="square" lIns="0" tIns="0" rIns="0" bIns="0">
             <a:spAutoFit/>
           </a:bodyPr>
           <a:lstStyle/>
@@ -7391,6 +7485,7 @@
           <a:lstStyle/>
           <a:p>
             <a:pPr algn="ctr"/>
+            <a:endParaRPr/>
           </a:p>
         </p:txBody>
       </p:sp>
@@ -7435,6 +7530,7 @@
           <a:lstStyle/>
           <a:p>
             <a:pPr algn="ctr"/>
+            <a:endParaRPr/>
           </a:p>
         </p:txBody>
       </p:sp>
@@ -7455,7 +7551,7 @@
           <a:noFill/>
         </p:spPr>
         <p:txBody>
-          <a:bodyPr wrap="square" lIns="0" rIns="0" tIns="0" bIns="0">
+          <a:bodyPr wrap="square" lIns="0" tIns="0" rIns="0" bIns="0">
             <a:spAutoFit/>
           </a:bodyPr>
           <a:lstStyle/>
@@ -7497,7 +7593,7 @@
           <a:noFill/>
         </p:spPr>
         <p:txBody>
-          <a:bodyPr wrap="square" lIns="0" rIns="0" tIns="0" bIns="0">
+          <a:bodyPr wrap="square" lIns="0" tIns="0" rIns="0" bIns="0">
             <a:spAutoFit/>
           </a:bodyPr>
           <a:lstStyle/>
@@ -7539,7 +7635,7 @@
           <a:noFill/>
         </p:spPr>
         <p:txBody>
-          <a:bodyPr wrap="square" lIns="0" rIns="0" tIns="0" bIns="0">
+          <a:bodyPr wrap="square" lIns="0" tIns="0" rIns="0" bIns="0">
             <a:spAutoFit/>
           </a:bodyPr>
           <a:lstStyle/>
@@ -7734,6 +7830,7 @@
           <a:lstStyle/>
           <a:p>
             <a:pPr algn="ctr"/>
+            <a:endParaRPr/>
           </a:p>
         </p:txBody>
       </p:sp>
@@ -7778,6 +7875,7 @@
           <a:lstStyle/>
           <a:p>
             <a:pPr algn="ctr"/>
+            <a:endParaRPr/>
           </a:p>
         </p:txBody>
       </p:sp>
@@ -7798,7 +7896,7 @@
           <a:noFill/>
         </p:spPr>
         <p:txBody>
-          <a:bodyPr wrap="square" lIns="0" rIns="0" tIns="0" bIns="0">
+          <a:bodyPr wrap="square" lIns="0" tIns="0" rIns="0" bIns="0">
             <a:spAutoFit/>
           </a:bodyPr>
           <a:lstStyle/>
@@ -7841,7 +7939,7 @@
 </file>
 
 <file path=ppt/slides/slide4.xml><?xml version="1.0" encoding="utf-8"?>
-<p:sld xmlns:a="http://schemas.openxmlformats.org/drawingml/2006/main" xmlns:p="http://schemas.openxmlformats.org/presentationml/2006/main" xmlns:r="http://schemas.openxmlformats.org/officeDocument/2006/relationships">
+<p:sld xmlns:a="http://schemas.openxmlformats.org/drawingml/2006/main" xmlns:r="http://schemas.openxmlformats.org/officeDocument/2006/relationships" xmlns:p="http://schemas.openxmlformats.org/presentationml/2006/main">
   <p:cSld>
     <p:spTree>
       <p:nvGrpSpPr>
@@ -7849,7 +7947,14 @@
         <p:cNvGrpSpPr/>
         <p:nvPr/>
       </p:nvGrpSpPr>
-      <p:grpSpPr/>
+      <p:grpSpPr>
+        <a:xfrm>
+          <a:off x="0" y="0"/>
+          <a:ext cx="0" cy="0"/>
+          <a:chOff x="0" y="0"/>
+          <a:chExt cx="0" cy="0"/>
+        </a:xfrm>
+      </p:grpSpPr>
       <p:sp>
         <p:nvSpPr>
           <p:cNvPr id="2" name="Rectangle 1"/>
@@ -7891,6 +7996,7 @@
           <a:lstStyle/>
           <a:p>
             <a:pPr algn="ctr"/>
+            <a:endParaRPr/>
           </a:p>
         </p:txBody>
       </p:sp>
@@ -7911,7 +8017,7 @@
           <a:noFill/>
         </p:spPr>
         <p:txBody>
-          <a:bodyPr wrap="square" lIns="0" rIns="0" tIns="0" bIns="0">
+          <a:bodyPr wrap="square" lIns="0" tIns="0" rIns="0" bIns="0">
             <a:spAutoFit/>
           </a:bodyPr>
           <a:lstStyle/>
@@ -7977,7 +8083,7 @@
           <a:noFill/>
         </p:spPr>
         <p:txBody>
-          <a:bodyPr wrap="square" lIns="0" rIns="0" tIns="0" bIns="0">
+          <a:bodyPr wrap="square" lIns="0" tIns="0" rIns="0" bIns="0">
             <a:spAutoFit/>
           </a:bodyPr>
           <a:lstStyle/>
@@ -8020,7 +8126,7 @@
           <a:noFill/>
         </p:spPr>
         <p:txBody>
-          <a:bodyPr wrap="square" lIns="0" rIns="0" tIns="0" bIns="0">
+          <a:bodyPr wrap="square" lIns="0" tIns="0" rIns="0" bIns="0">
             <a:spAutoFit/>
           </a:bodyPr>
           <a:lstStyle/>
@@ -8062,7 +8168,7 @@
           <a:noFill/>
         </p:spPr>
         <p:txBody>
-          <a:bodyPr wrap="square" lIns="0" rIns="0" tIns="0" bIns="0">
+          <a:bodyPr wrap="square" lIns="0" tIns="0" rIns="0" bIns="0">
             <a:spAutoFit/>
           </a:bodyPr>
           <a:lstStyle/>
@@ -8104,7 +8210,7 @@
           <a:noFill/>
         </p:spPr>
         <p:txBody>
-          <a:bodyPr wrap="square" lIns="0" rIns="0" tIns="0" bIns="0">
+          <a:bodyPr wrap="square" lIns="0" tIns="0" rIns="0" bIns="0">
             <a:spAutoFit/>
           </a:bodyPr>
           <a:lstStyle/>
@@ -8146,7 +8252,7 @@
           <a:noFill/>
         </p:spPr>
         <p:txBody>
-          <a:bodyPr wrap="square" lIns="0" rIns="0" tIns="0" bIns="0">
+          <a:bodyPr wrap="square" lIns="0" tIns="0" rIns="0" bIns="0">
             <a:spAutoFit/>
           </a:bodyPr>
           <a:lstStyle/>
@@ -8308,8 +8414,8 @@
         </p:nvSpPr>
         <p:spPr>
           <a:xfrm>
-            <a:off x="7452360" y="1965960"/>
-            <a:ext cx="4178808" cy="1481328"/>
+            <a:off x="7543800" y="1965960"/>
+            <a:ext cx="4087368" cy="1828800"/>
           </a:xfrm>
           <a:prstGeom prst="rect">
             <a:avLst/>
@@ -8341,6 +8447,7 @@
           <a:lstStyle/>
           <a:p>
             <a:pPr algn="ctr"/>
+            <a:endParaRPr/>
           </a:p>
         </p:txBody>
       </p:sp>
@@ -8353,7 +8460,7 @@
         <p:spPr>
           <a:xfrm>
             <a:off x="7452360" y="1965960"/>
-            <a:ext cx="45720" cy="1481328"/>
+            <a:ext cx="45719" cy="1828800"/>
           </a:xfrm>
           <a:prstGeom prst="rect">
             <a:avLst/>
@@ -8385,6 +8492,7 @@
           <a:lstStyle/>
           <a:p>
             <a:pPr algn="ctr"/>
+            <a:endParaRPr/>
           </a:p>
         </p:txBody>
       </p:sp>
@@ -8405,7 +8513,7 @@
           <a:noFill/>
         </p:spPr>
         <p:txBody>
-          <a:bodyPr wrap="square" lIns="0" rIns="0" tIns="0" bIns="0">
+          <a:bodyPr wrap="square" lIns="0" tIns="0" rIns="0" bIns="0">
             <a:spAutoFit/>
           </a:bodyPr>
           <a:lstStyle/>
@@ -8419,7 +8527,7 @@
               </a:spcAft>
             </a:pPr>
             <a:r>
-              <a:rPr sz="1350" b="1" i="0">
+              <a:rPr sz="1350" b="1" i="0" dirty="0">
                 <a:solidFill>
                   <a:srgbClr val="255C45"/>
                 </a:solidFill>
@@ -8428,7 +8536,7 @@
               <a:t>Adoption beyond the mandate. </a:t>
             </a:r>
             <a:r>
-              <a:rPr sz="1350" b="0" i="0">
+              <a:rPr sz="1350" b="0" i="0" dirty="0">
                 <a:solidFill>
                   <a:srgbClr val="262626"/>
                 </a:solidFill>
@@ -8456,7 +8564,7 @@
           <a:noFill/>
         </p:spPr>
         <p:txBody>
-          <a:bodyPr wrap="square" lIns="0" rIns="0" tIns="0" bIns="0">
+          <a:bodyPr wrap="square" lIns="0" tIns="0" rIns="0" bIns="0">
             <a:spAutoFit/>
           </a:bodyPr>
           <a:lstStyle/>
@@ -8498,7 +8606,7 @@
           <a:noFill/>
         </p:spPr>
         <p:txBody>
-          <a:bodyPr wrap="square" lIns="0" rIns="0" tIns="0" bIns="0">
+          <a:bodyPr wrap="square" lIns="0" tIns="0" rIns="0" bIns="0">
             <a:spAutoFit/>
           </a:bodyPr>
           <a:lstStyle/>
@@ -8532,7 +8640,7 @@
 </file>
 
 <file path=ppt/slides/slide5.xml><?xml version="1.0" encoding="utf-8"?>
-<p:sld xmlns:a="http://schemas.openxmlformats.org/drawingml/2006/main" xmlns:p="http://schemas.openxmlformats.org/presentationml/2006/main" xmlns:r="http://schemas.openxmlformats.org/officeDocument/2006/relationships">
+<p:sld xmlns:a="http://schemas.openxmlformats.org/drawingml/2006/main" xmlns:r="http://schemas.openxmlformats.org/officeDocument/2006/relationships" xmlns:p="http://schemas.openxmlformats.org/presentationml/2006/main">
   <p:cSld>
     <p:spTree>
       <p:nvGrpSpPr>
@@ -8540,7 +8648,14 @@
         <p:cNvGrpSpPr/>
         <p:nvPr/>
       </p:nvGrpSpPr>
-      <p:grpSpPr/>
+      <p:grpSpPr>
+        <a:xfrm>
+          <a:off x="0" y="0"/>
+          <a:ext cx="0" cy="0"/>
+          <a:chOff x="0" y="0"/>
+          <a:chExt cx="0" cy="0"/>
+        </a:xfrm>
+      </p:grpSpPr>
       <p:sp>
         <p:nvSpPr>
           <p:cNvPr id="2" name="Rectangle 1"/>
@@ -8582,6 +8697,7 @@
           <a:lstStyle/>
           <a:p>
             <a:pPr algn="ctr"/>
+            <a:endParaRPr/>
           </a:p>
         </p:txBody>
       </p:sp>
@@ -8602,7 +8718,7 @@
           <a:noFill/>
         </p:spPr>
         <p:txBody>
-          <a:bodyPr wrap="square" lIns="0" rIns="0" tIns="0" bIns="0">
+          <a:bodyPr wrap="square" lIns="0" tIns="0" rIns="0" bIns="0">
             <a:spAutoFit/>
           </a:bodyPr>
           <a:lstStyle/>
@@ -8668,7 +8784,7 @@
           <a:noFill/>
         </p:spPr>
         <p:txBody>
-          <a:bodyPr wrap="square" lIns="0" rIns="0" tIns="0" bIns="0">
+          <a:bodyPr wrap="square" lIns="0" tIns="0" rIns="0" bIns="0">
             <a:spAutoFit/>
           </a:bodyPr>
           <a:lstStyle/>
@@ -8711,7 +8827,7 @@
           <a:noFill/>
         </p:spPr>
         <p:txBody>
-          <a:bodyPr wrap="square" lIns="0" rIns="0" tIns="0" bIns="0">
+          <a:bodyPr wrap="square" lIns="0" tIns="0" rIns="0" bIns="0">
             <a:spAutoFit/>
           </a:bodyPr>
           <a:lstStyle/>
@@ -8753,7 +8869,7 @@
           <a:noFill/>
         </p:spPr>
         <p:txBody>
-          <a:bodyPr wrap="square" lIns="0" rIns="0" tIns="0" bIns="0">
+          <a:bodyPr wrap="square" lIns="0" tIns="0" rIns="0" bIns="0">
             <a:spAutoFit/>
           </a:bodyPr>
           <a:lstStyle/>
@@ -8795,7 +8911,7 @@
           <a:noFill/>
         </p:spPr>
         <p:txBody>
-          <a:bodyPr wrap="square" lIns="0" rIns="0" tIns="0" bIns="0">
+          <a:bodyPr wrap="square" lIns="0" tIns="0" rIns="0" bIns="0">
             <a:spAutoFit/>
           </a:bodyPr>
           <a:lstStyle/>
@@ -8837,7 +8953,7 @@
           <a:noFill/>
         </p:spPr>
         <p:txBody>
-          <a:bodyPr wrap="square" lIns="0" rIns="0" tIns="0" bIns="0">
+          <a:bodyPr wrap="square" lIns="0" tIns="0" rIns="0" bIns="0">
             <a:spAutoFit/>
           </a:bodyPr>
           <a:lstStyle/>
@@ -8879,7 +8995,7 @@
           <a:noFill/>
         </p:spPr>
         <p:txBody>
-          <a:bodyPr wrap="square" lIns="0" rIns="0" tIns="0" bIns="0">
+          <a:bodyPr wrap="square" lIns="0" tIns="0" rIns="0" bIns="0">
             <a:spAutoFit/>
           </a:bodyPr>
           <a:lstStyle/>
@@ -8945,6 +9061,7 @@
           <a:lstStyle/>
           <a:p>
             <a:pPr algn="ctr"/>
+            <a:endParaRPr/>
           </a:p>
         </p:txBody>
       </p:sp>
@@ -8989,6 +9106,7 @@
           <a:lstStyle/>
           <a:p>
             <a:pPr algn="ctr"/>
+            <a:endParaRPr/>
           </a:p>
         </p:txBody>
       </p:sp>
@@ -9009,7 +9127,7 @@
           <a:noFill/>
         </p:spPr>
         <p:txBody>
-          <a:bodyPr wrap="square" lIns="0" rIns="0" tIns="0" bIns="0">
+          <a:bodyPr wrap="square" lIns="0" tIns="0" rIns="0" bIns="0">
             <a:spAutoFit/>
           </a:bodyPr>
           <a:lstStyle/>
@@ -9051,7 +9169,7 @@
           <a:noFill/>
         </p:spPr>
         <p:txBody>
-          <a:bodyPr wrap="square" lIns="0" rIns="0" tIns="0" bIns="0">
+          <a:bodyPr wrap="square" lIns="0" tIns="0" rIns="0" bIns="0">
             <a:spAutoFit/>
           </a:bodyPr>
           <a:lstStyle/>
@@ -9117,6 +9235,7 @@
           <a:lstStyle/>
           <a:p>
             <a:pPr algn="ctr"/>
+            <a:endParaRPr/>
           </a:p>
         </p:txBody>
       </p:sp>
@@ -9161,6 +9280,7 @@
           <a:lstStyle/>
           <a:p>
             <a:pPr algn="ctr"/>
+            <a:endParaRPr/>
           </a:p>
         </p:txBody>
       </p:sp>
@@ -9181,7 +9301,7 @@
           <a:noFill/>
         </p:spPr>
         <p:txBody>
-          <a:bodyPr wrap="square" lIns="0" rIns="0" tIns="0" bIns="0">
+          <a:bodyPr wrap="square" lIns="0" tIns="0" rIns="0" bIns="0">
             <a:spAutoFit/>
           </a:bodyPr>
           <a:lstStyle/>
@@ -9223,7 +9343,7 @@
           <a:noFill/>
         </p:spPr>
         <p:txBody>
-          <a:bodyPr wrap="square" lIns="0" rIns="0" tIns="0" bIns="0">
+          <a:bodyPr wrap="square" lIns="0" tIns="0" rIns="0" bIns="0">
             <a:spAutoFit/>
           </a:bodyPr>
           <a:lstStyle/>
@@ -9289,6 +9409,7 @@
           <a:lstStyle/>
           <a:p>
             <a:pPr algn="ctr"/>
+            <a:endParaRPr/>
           </a:p>
         </p:txBody>
       </p:sp>
@@ -9333,6 +9454,7 @@
           <a:lstStyle/>
           <a:p>
             <a:pPr algn="ctr"/>
+            <a:endParaRPr/>
           </a:p>
         </p:txBody>
       </p:sp>
@@ -9353,7 +9475,7 @@
           <a:noFill/>
         </p:spPr>
         <p:txBody>
-          <a:bodyPr wrap="square" lIns="0" rIns="0" tIns="0" bIns="0">
+          <a:bodyPr wrap="square" lIns="0" tIns="0" rIns="0" bIns="0">
             <a:spAutoFit/>
           </a:bodyPr>
           <a:lstStyle/>
@@ -9395,7 +9517,7 @@
           <a:noFill/>
         </p:spPr>
         <p:txBody>
-          <a:bodyPr wrap="square" lIns="0" rIns="0" tIns="0" bIns="0">
+          <a:bodyPr wrap="square" lIns="0" tIns="0" rIns="0" bIns="0">
             <a:spAutoFit/>
           </a:bodyPr>
           <a:lstStyle/>
@@ -9461,6 +9583,7 @@
           <a:lstStyle/>
           <a:p>
             <a:pPr algn="ctr"/>
+            <a:endParaRPr/>
           </a:p>
         </p:txBody>
       </p:sp>
@@ -9505,6 +9628,7 @@
           <a:lstStyle/>
           <a:p>
             <a:pPr algn="ctr"/>
+            <a:endParaRPr/>
           </a:p>
         </p:txBody>
       </p:sp>
@@ -9525,7 +9649,7 @@
           <a:noFill/>
         </p:spPr>
         <p:txBody>
-          <a:bodyPr wrap="square" lIns="0" rIns="0" tIns="0" bIns="0">
+          <a:bodyPr wrap="square" lIns="0" tIns="0" rIns="0" bIns="0">
             <a:spAutoFit/>
           </a:bodyPr>
           <a:lstStyle/>
@@ -9567,7 +9691,7 @@
           <a:noFill/>
         </p:spPr>
         <p:txBody>
-          <a:bodyPr wrap="square" lIns="0" rIns="0" tIns="0" bIns="0">
+          <a:bodyPr wrap="square" lIns="0" tIns="0" rIns="0" bIns="0">
             <a:spAutoFit/>
           </a:bodyPr>
           <a:lstStyle/>
@@ -9633,6 +9757,7 @@
           <a:lstStyle/>
           <a:p>
             <a:pPr algn="ctr"/>
+            <a:endParaRPr/>
           </a:p>
         </p:txBody>
       </p:sp>
@@ -9677,6 +9802,7 @@
           <a:lstStyle/>
           <a:p>
             <a:pPr algn="ctr"/>
+            <a:endParaRPr/>
           </a:p>
         </p:txBody>
       </p:sp>
@@ -9697,7 +9823,7 @@
           <a:noFill/>
         </p:spPr>
         <p:txBody>
-          <a:bodyPr wrap="square" lIns="0" rIns="0" tIns="0" bIns="0">
+          <a:bodyPr wrap="square" lIns="0" tIns="0" rIns="0" bIns="0">
             <a:spAutoFit/>
           </a:bodyPr>
           <a:lstStyle/>
@@ -9739,7 +9865,7 @@
           <a:noFill/>
         </p:spPr>
         <p:txBody>
-          <a:bodyPr wrap="square" lIns="0" rIns="0" tIns="0" bIns="0">
+          <a:bodyPr wrap="square" lIns="0" tIns="0" rIns="0" bIns="0">
             <a:spAutoFit/>
           </a:bodyPr>
           <a:lstStyle/>
@@ -9805,6 +9931,7 @@
           <a:lstStyle/>
           <a:p>
             <a:pPr algn="ctr"/>
+            <a:endParaRPr/>
           </a:p>
         </p:txBody>
       </p:sp>
@@ -9849,6 +9976,7 @@
           <a:lstStyle/>
           <a:p>
             <a:pPr algn="ctr"/>
+            <a:endParaRPr/>
           </a:p>
         </p:txBody>
       </p:sp>
@@ -9869,7 +9997,7 @@
           <a:noFill/>
         </p:spPr>
         <p:txBody>
-          <a:bodyPr wrap="square" lIns="0" rIns="0" tIns="0" bIns="0">
+          <a:bodyPr wrap="square" lIns="0" tIns="0" rIns="0" bIns="0">
             <a:spAutoFit/>
           </a:bodyPr>
           <a:lstStyle/>
@@ -9911,7 +10039,7 @@
           <a:noFill/>
         </p:spPr>
         <p:txBody>
-          <a:bodyPr wrap="square" lIns="0" rIns="0" tIns="0" bIns="0">
+          <a:bodyPr wrap="square" lIns="0" tIns="0" rIns="0" bIns="0">
             <a:spAutoFit/>
           </a:bodyPr>
           <a:lstStyle/>
@@ -9977,6 +10105,7 @@
           <a:lstStyle/>
           <a:p>
             <a:pPr algn="ctr"/>
+            <a:endParaRPr/>
           </a:p>
         </p:txBody>
       </p:sp>
@@ -10021,6 +10150,7 @@
           <a:lstStyle/>
           <a:p>
             <a:pPr algn="ctr"/>
+            <a:endParaRPr/>
           </a:p>
         </p:txBody>
       </p:sp>
@@ -10041,7 +10171,7 @@
           <a:noFill/>
         </p:spPr>
         <p:txBody>
-          <a:bodyPr wrap="square" lIns="0" rIns="0" tIns="0" bIns="0">
+          <a:bodyPr wrap="square" lIns="0" tIns="0" rIns="0" bIns="0">
             <a:spAutoFit/>
           </a:bodyPr>
           <a:lstStyle/>
@@ -10083,7 +10213,7 @@
           <a:noFill/>
         </p:spPr>
         <p:txBody>
-          <a:bodyPr wrap="square" lIns="0" rIns="0" tIns="0" bIns="0">
+          <a:bodyPr wrap="square" lIns="0" tIns="0" rIns="0" bIns="0">
             <a:spAutoFit/>
           </a:bodyPr>
           <a:lstStyle/>
@@ -10149,6 +10279,7 @@
           <a:lstStyle/>
           <a:p>
             <a:pPr algn="ctr"/>
+            <a:endParaRPr/>
           </a:p>
         </p:txBody>
       </p:sp>
@@ -10193,6 +10324,7 @@
           <a:lstStyle/>
           <a:p>
             <a:pPr algn="ctr"/>
+            <a:endParaRPr/>
           </a:p>
         </p:txBody>
       </p:sp>
@@ -10213,7 +10345,7 @@
           <a:noFill/>
         </p:spPr>
         <p:txBody>
-          <a:bodyPr wrap="square" lIns="0" rIns="0" tIns="0" bIns="0">
+          <a:bodyPr wrap="square" lIns="0" tIns="0" rIns="0" bIns="0">
             <a:spAutoFit/>
           </a:bodyPr>
           <a:lstStyle/>
@@ -10255,7 +10387,7 @@
           <a:noFill/>
         </p:spPr>
         <p:txBody>
-          <a:bodyPr wrap="square" lIns="0" rIns="0" tIns="0" bIns="0">
+          <a:bodyPr wrap="square" lIns="0" tIns="0" rIns="0" bIns="0">
             <a:spAutoFit/>
           </a:bodyPr>
           <a:lstStyle/>
@@ -10297,7 +10429,7 @@
           <a:noFill/>
         </p:spPr>
         <p:txBody>
-          <a:bodyPr wrap="square" lIns="0" rIns="0" tIns="0" bIns="0">
+          <a:bodyPr wrap="square" lIns="0" tIns="0" rIns="0" bIns="0">
             <a:spAutoFit/>
           </a:bodyPr>
           <a:lstStyle/>
@@ -10423,7 +10555,7 @@
 </file>
 
 <file path=ppt/slides/slide6.xml><?xml version="1.0" encoding="utf-8"?>
-<p:sld xmlns:a="http://schemas.openxmlformats.org/drawingml/2006/main" xmlns:p="http://schemas.openxmlformats.org/presentationml/2006/main" xmlns:r="http://schemas.openxmlformats.org/officeDocument/2006/relationships">
+<p:sld xmlns:a="http://schemas.openxmlformats.org/drawingml/2006/main" xmlns:r="http://schemas.openxmlformats.org/officeDocument/2006/relationships" xmlns:p="http://schemas.openxmlformats.org/presentationml/2006/main">
   <p:cSld>
     <p:spTree>
       <p:nvGrpSpPr>
@@ -10431,7 +10563,14 @@
         <p:cNvGrpSpPr/>
         <p:nvPr/>
       </p:nvGrpSpPr>
-      <p:grpSpPr/>
+      <p:grpSpPr>
+        <a:xfrm>
+          <a:off x="0" y="0"/>
+          <a:ext cx="0" cy="0"/>
+          <a:chOff x="0" y="0"/>
+          <a:chExt cx="0" cy="0"/>
+        </a:xfrm>
+      </p:grpSpPr>
       <p:sp>
         <p:nvSpPr>
           <p:cNvPr id="2" name="Rectangle 1"/>
@@ -10473,6 +10612,7 @@
           <a:lstStyle/>
           <a:p>
             <a:pPr algn="ctr"/>
+            <a:endParaRPr/>
           </a:p>
         </p:txBody>
       </p:sp>
@@ -10493,7 +10633,7 @@
           <a:noFill/>
         </p:spPr>
         <p:txBody>
-          <a:bodyPr wrap="square" lIns="0" rIns="0" tIns="0" bIns="0">
+          <a:bodyPr wrap="square" lIns="0" tIns="0" rIns="0" bIns="0">
             <a:spAutoFit/>
           </a:bodyPr>
           <a:lstStyle/>
@@ -10559,7 +10699,7 @@
           <a:noFill/>
         </p:spPr>
         <p:txBody>
-          <a:bodyPr wrap="square" lIns="0" rIns="0" tIns="0" bIns="0">
+          <a:bodyPr wrap="square" lIns="0" tIns="0" rIns="0" bIns="0">
             <a:spAutoFit/>
           </a:bodyPr>
           <a:lstStyle/>
@@ -10601,7 +10741,7 @@
           <a:noFill/>
         </p:spPr>
         <p:txBody>
-          <a:bodyPr wrap="square" lIns="0" rIns="0" tIns="0" bIns="0">
+          <a:bodyPr wrap="square" lIns="0" tIns="0" rIns="0" bIns="0">
             <a:spAutoFit/>
           </a:bodyPr>
           <a:lstStyle/>
@@ -10643,7 +10783,7 @@
           <a:noFill/>
         </p:spPr>
         <p:txBody>
-          <a:bodyPr wrap="square" lIns="0" rIns="0" tIns="0" bIns="0">
+          <a:bodyPr wrap="square" lIns="0" tIns="0" rIns="0" bIns="0">
             <a:spAutoFit/>
           </a:bodyPr>
           <a:lstStyle/>
@@ -10685,7 +10825,7 @@
           <a:noFill/>
         </p:spPr>
         <p:txBody>
-          <a:bodyPr wrap="square" lIns="0" rIns="0" tIns="0" bIns="0">
+          <a:bodyPr wrap="square" lIns="0" tIns="0" rIns="0" bIns="0">
             <a:spAutoFit/>
           </a:bodyPr>
           <a:lstStyle/>
@@ -10751,6 +10891,7 @@
           <a:lstStyle/>
           <a:p>
             <a:pPr algn="ctr"/>
+            <a:endParaRPr/>
           </a:p>
         </p:txBody>
       </p:sp>
@@ -10795,6 +10936,7 @@
           <a:lstStyle/>
           <a:p>
             <a:pPr algn="ctr"/>
+            <a:endParaRPr/>
           </a:p>
         </p:txBody>
       </p:sp>
@@ -10815,7 +10957,7 @@
           <a:noFill/>
         </p:spPr>
         <p:txBody>
-          <a:bodyPr wrap="square" lIns="0" rIns="0" tIns="0" bIns="0">
+          <a:bodyPr wrap="square" lIns="0" tIns="0" rIns="0" bIns="0">
             <a:spAutoFit/>
           </a:bodyPr>
           <a:lstStyle/>
@@ -10857,7 +10999,7 @@
           <a:noFill/>
         </p:spPr>
         <p:txBody>
-          <a:bodyPr wrap="square" lIns="0" rIns="0" tIns="0" bIns="0">
+          <a:bodyPr wrap="square" lIns="0" tIns="0" rIns="0" bIns="0">
             <a:spAutoFit/>
           </a:bodyPr>
           <a:lstStyle/>
@@ -10961,6 +11103,7 @@
           <a:lstStyle/>
           <a:p>
             <a:pPr algn="ctr"/>
+            <a:endParaRPr/>
           </a:p>
         </p:txBody>
       </p:sp>
@@ -11005,6 +11148,7 @@
           <a:lstStyle/>
           <a:p>
             <a:pPr algn="ctr"/>
+            <a:endParaRPr/>
           </a:p>
         </p:txBody>
       </p:sp>
@@ -11025,7 +11169,7 @@
           <a:noFill/>
         </p:spPr>
         <p:txBody>
-          <a:bodyPr wrap="square" lIns="0" rIns="0" tIns="0" bIns="0">
+          <a:bodyPr wrap="square" lIns="0" tIns="0" rIns="0" bIns="0">
             <a:spAutoFit/>
           </a:bodyPr>
           <a:lstStyle/>
@@ -11067,7 +11211,7 @@
           <a:noFill/>
         </p:spPr>
         <p:txBody>
-          <a:bodyPr wrap="square" lIns="0" rIns="0" tIns="0" bIns="0">
+          <a:bodyPr wrap="square" lIns="0" tIns="0" rIns="0" bIns="0">
             <a:spAutoFit/>
           </a:bodyPr>
           <a:lstStyle/>
@@ -11152,6 +11296,7 @@
           <a:lstStyle/>
           <a:p>
             <a:pPr algn="ctr"/>
+            <a:endParaRPr/>
           </a:p>
         </p:txBody>
       </p:sp>
@@ -11196,6 +11341,7 @@
           <a:lstStyle/>
           <a:p>
             <a:pPr algn="ctr"/>
+            <a:endParaRPr/>
           </a:p>
         </p:txBody>
       </p:sp>
@@ -11216,7 +11362,7 @@
           <a:noFill/>
         </p:spPr>
         <p:txBody>
-          <a:bodyPr wrap="square" lIns="0" rIns="0" tIns="0" bIns="0">
+          <a:bodyPr wrap="square" lIns="0" tIns="0" rIns="0" bIns="0">
             <a:spAutoFit/>
           </a:bodyPr>
           <a:lstStyle/>
@@ -11230,7 +11376,7 @@
               </a:spcAft>
             </a:pPr>
             <a:r>
-              <a:rPr sz="1350" b="1" i="0">
+              <a:rPr sz="1350" b="1" i="0" dirty="0">
                 <a:solidFill>
                   <a:srgbClr val="8A5610"/>
                 </a:solidFill>
@@ -11239,7 +11385,7 @@
               <a:t>The realistic caveat. </a:t>
             </a:r>
             <a:r>
-              <a:rPr sz="1350" b="0" i="0">
+              <a:rPr sz="1350" b="0" i="0" dirty="0">
                 <a:solidFill>
                   <a:srgbClr val="262626"/>
                 </a:solidFill>
@@ -11259,7 +11405,7 @@
 </file>
 
 <file path=ppt/slides/slide7.xml><?xml version="1.0" encoding="utf-8"?>
-<p:sld xmlns:a="http://schemas.openxmlformats.org/drawingml/2006/main" xmlns:p="http://schemas.openxmlformats.org/presentationml/2006/main" xmlns:r="http://schemas.openxmlformats.org/officeDocument/2006/relationships">
+<p:sld xmlns:a="http://schemas.openxmlformats.org/drawingml/2006/main" xmlns:r="http://schemas.openxmlformats.org/officeDocument/2006/relationships" xmlns:p="http://schemas.openxmlformats.org/presentationml/2006/main">
   <p:cSld>
     <p:spTree>
       <p:nvGrpSpPr>
@@ -11267,7 +11413,14 @@
         <p:cNvGrpSpPr/>
         <p:nvPr/>
       </p:nvGrpSpPr>
-      <p:grpSpPr/>
+      <p:grpSpPr>
+        <a:xfrm>
+          <a:off x="0" y="0"/>
+          <a:ext cx="0" cy="0"/>
+          <a:chOff x="0" y="0"/>
+          <a:chExt cx="0" cy="0"/>
+        </a:xfrm>
+      </p:grpSpPr>
       <p:sp>
         <p:nvSpPr>
           <p:cNvPr id="2" name="Rectangle 1"/>
@@ -11309,6 +11462,7 @@
           <a:lstStyle/>
           <a:p>
             <a:pPr algn="ctr"/>
+            <a:endParaRPr/>
           </a:p>
         </p:txBody>
       </p:sp>
@@ -11329,7 +11483,7 @@
           <a:noFill/>
         </p:spPr>
         <p:txBody>
-          <a:bodyPr wrap="square" lIns="0" rIns="0" tIns="0" bIns="0">
+          <a:bodyPr wrap="square" lIns="0" tIns="0" rIns="0" bIns="0">
             <a:spAutoFit/>
           </a:bodyPr>
           <a:lstStyle/>
@@ -11395,7 +11549,7 @@
           <a:noFill/>
         </p:spPr>
         <p:txBody>
-          <a:bodyPr wrap="square" lIns="0" rIns="0" tIns="0" bIns="0">
+          <a:bodyPr wrap="square" lIns="0" tIns="0" rIns="0" bIns="0">
             <a:spAutoFit/>
           </a:bodyPr>
           <a:lstStyle/>
@@ -11438,7 +11592,7 @@
           <a:noFill/>
         </p:spPr>
         <p:txBody>
-          <a:bodyPr wrap="square" lIns="0" rIns="0" tIns="0" bIns="0">
+          <a:bodyPr wrap="square" lIns="0" tIns="0" rIns="0" bIns="0">
             <a:spAutoFit/>
           </a:bodyPr>
           <a:lstStyle/>
@@ -11480,7 +11634,7 @@
           <a:noFill/>
         </p:spPr>
         <p:txBody>
-          <a:bodyPr wrap="square" lIns="0" rIns="0" tIns="0" bIns="0">
+          <a:bodyPr wrap="square" lIns="0" tIns="0" rIns="0" bIns="0">
             <a:spAutoFit/>
           </a:bodyPr>
           <a:lstStyle/>
@@ -11522,7 +11676,7 @@
           <a:noFill/>
         </p:spPr>
         <p:txBody>
-          <a:bodyPr wrap="square" lIns="0" rIns="0" tIns="0" bIns="0">
+          <a:bodyPr wrap="square" lIns="0" tIns="0" rIns="0" bIns="0">
             <a:spAutoFit/>
           </a:bodyPr>
           <a:lstStyle/>
@@ -11564,7 +11718,7 @@
           <a:noFill/>
         </p:spPr>
         <p:txBody>
-          <a:bodyPr wrap="square" lIns="0" rIns="0" tIns="0" bIns="0">
+          <a:bodyPr wrap="square" lIns="0" tIns="0" rIns="0" bIns="0">
             <a:spAutoFit/>
           </a:bodyPr>
           <a:lstStyle/>
@@ -11606,7 +11760,7 @@
           <a:noFill/>
         </p:spPr>
         <p:txBody>
-          <a:bodyPr wrap="square" lIns="0" rIns="0" tIns="0" bIns="0">
+          <a:bodyPr wrap="square" lIns="0" tIns="0" rIns="0" bIns="0">
             <a:spAutoFit/>
           </a:bodyPr>
           <a:lstStyle/>
@@ -11672,6 +11826,7 @@
           <a:lstStyle/>
           <a:p>
             <a:pPr algn="ctr"/>
+            <a:endParaRPr/>
           </a:p>
         </p:txBody>
       </p:sp>
@@ -11716,6 +11871,7 @@
           <a:lstStyle/>
           <a:p>
             <a:pPr algn="ctr"/>
+            <a:endParaRPr/>
           </a:p>
         </p:txBody>
       </p:sp>
@@ -11736,7 +11892,7 @@
           <a:noFill/>
         </p:spPr>
         <p:txBody>
-          <a:bodyPr wrap="square" lIns="0" rIns="0" tIns="0" bIns="0">
+          <a:bodyPr wrap="square" lIns="0" tIns="0" rIns="0" bIns="0">
             <a:spAutoFit/>
           </a:bodyPr>
           <a:lstStyle/>
@@ -11778,7 +11934,7 @@
           <a:noFill/>
         </p:spPr>
         <p:txBody>
-          <a:bodyPr wrap="square" lIns="0" rIns="0" tIns="0" bIns="0">
+          <a:bodyPr wrap="square" lIns="0" tIns="0" rIns="0" bIns="0">
             <a:spAutoFit/>
           </a:bodyPr>
           <a:lstStyle/>
@@ -11844,6 +12000,7 @@
           <a:lstStyle/>
           <a:p>
             <a:pPr algn="ctr"/>
+            <a:endParaRPr/>
           </a:p>
         </p:txBody>
       </p:sp>
@@ -11888,6 +12045,7 @@
           <a:lstStyle/>
           <a:p>
             <a:pPr algn="ctr"/>
+            <a:endParaRPr/>
           </a:p>
         </p:txBody>
       </p:sp>
@@ -11908,7 +12066,7 @@
           <a:noFill/>
         </p:spPr>
         <p:txBody>
-          <a:bodyPr wrap="square" lIns="0" rIns="0" tIns="0" bIns="0">
+          <a:bodyPr wrap="square" lIns="0" tIns="0" rIns="0" bIns="0">
             <a:spAutoFit/>
           </a:bodyPr>
           <a:lstStyle/>
@@ -11950,7 +12108,7 @@
           <a:noFill/>
         </p:spPr>
         <p:txBody>
-          <a:bodyPr wrap="square" lIns="0" rIns="0" tIns="0" bIns="0">
+          <a:bodyPr wrap="square" lIns="0" tIns="0" rIns="0" bIns="0">
             <a:spAutoFit/>
           </a:bodyPr>
           <a:lstStyle/>
@@ -12016,6 +12174,7 @@
           <a:lstStyle/>
           <a:p>
             <a:pPr algn="ctr"/>
+            <a:endParaRPr/>
           </a:p>
         </p:txBody>
       </p:sp>
@@ -12060,6 +12219,7 @@
           <a:lstStyle/>
           <a:p>
             <a:pPr algn="ctr"/>
+            <a:endParaRPr/>
           </a:p>
         </p:txBody>
       </p:sp>
@@ -12080,7 +12240,7 @@
           <a:noFill/>
         </p:spPr>
         <p:txBody>
-          <a:bodyPr wrap="square" lIns="0" rIns="0" tIns="0" bIns="0">
+          <a:bodyPr wrap="square" lIns="0" tIns="0" rIns="0" bIns="0">
             <a:spAutoFit/>
           </a:bodyPr>
           <a:lstStyle/>
@@ -12122,7 +12282,7 @@
           <a:noFill/>
         </p:spPr>
         <p:txBody>
-          <a:bodyPr wrap="square" lIns="0" rIns="0" tIns="0" bIns="0">
+          <a:bodyPr wrap="square" lIns="0" tIns="0" rIns="0" bIns="0">
             <a:spAutoFit/>
           </a:bodyPr>
           <a:lstStyle/>
@@ -12188,6 +12348,7 @@
           <a:lstStyle/>
           <a:p>
             <a:pPr algn="ctr"/>
+            <a:endParaRPr/>
           </a:p>
         </p:txBody>
       </p:sp>
@@ -12232,6 +12393,7 @@
           <a:lstStyle/>
           <a:p>
             <a:pPr algn="ctr"/>
+            <a:endParaRPr/>
           </a:p>
         </p:txBody>
       </p:sp>
@@ -12252,7 +12414,7 @@
           <a:noFill/>
         </p:spPr>
         <p:txBody>
-          <a:bodyPr wrap="square" lIns="0" rIns="0" tIns="0" bIns="0">
+          <a:bodyPr wrap="square" lIns="0" tIns="0" rIns="0" bIns="0">
             <a:spAutoFit/>
           </a:bodyPr>
           <a:lstStyle/>
@@ -12294,7 +12456,7 @@
           <a:noFill/>
         </p:spPr>
         <p:txBody>
-          <a:bodyPr wrap="square" lIns="0" rIns="0" tIns="0" bIns="0">
+          <a:bodyPr wrap="square" lIns="0" tIns="0" rIns="0" bIns="0">
             <a:spAutoFit/>
           </a:bodyPr>
           <a:lstStyle/>
@@ -12360,6 +12522,7 @@
           <a:lstStyle/>
           <a:p>
             <a:pPr algn="ctr"/>
+            <a:endParaRPr/>
           </a:p>
         </p:txBody>
       </p:sp>
@@ -12404,6 +12567,7 @@
           <a:lstStyle/>
           <a:p>
             <a:pPr algn="ctr"/>
+            <a:endParaRPr/>
           </a:p>
         </p:txBody>
       </p:sp>
@@ -12424,7 +12588,7 @@
           <a:noFill/>
         </p:spPr>
         <p:txBody>
-          <a:bodyPr wrap="square" lIns="0" rIns="0" tIns="0" bIns="0">
+          <a:bodyPr wrap="square" lIns="0" tIns="0" rIns="0" bIns="0">
             <a:spAutoFit/>
           </a:bodyPr>
           <a:lstStyle/>
@@ -12466,7 +12630,7 @@
           <a:noFill/>
         </p:spPr>
         <p:txBody>
-          <a:bodyPr wrap="square" lIns="0" rIns="0" tIns="0" bIns="0">
+          <a:bodyPr wrap="square" lIns="0" tIns="0" rIns="0" bIns="0">
             <a:spAutoFit/>
           </a:bodyPr>
           <a:lstStyle/>
@@ -12532,6 +12696,7 @@
           <a:lstStyle/>
           <a:p>
             <a:pPr algn="ctr"/>
+            <a:endParaRPr/>
           </a:p>
         </p:txBody>
       </p:sp>
@@ -12576,6 +12741,7 @@
           <a:lstStyle/>
           <a:p>
             <a:pPr algn="ctr"/>
+            <a:endParaRPr/>
           </a:p>
         </p:txBody>
       </p:sp>
@@ -12596,7 +12762,7 @@
           <a:noFill/>
         </p:spPr>
         <p:txBody>
-          <a:bodyPr wrap="square" lIns="0" rIns="0" tIns="0" bIns="0">
+          <a:bodyPr wrap="square" lIns="0" tIns="0" rIns="0" bIns="0">
             <a:spAutoFit/>
           </a:bodyPr>
           <a:lstStyle/>
@@ -12638,7 +12804,7 @@
           <a:noFill/>
         </p:spPr>
         <p:txBody>
-          <a:bodyPr wrap="square" lIns="0" rIns="0" tIns="0" bIns="0">
+          <a:bodyPr wrap="square" lIns="0" tIns="0" rIns="0" bIns="0">
             <a:spAutoFit/>
           </a:bodyPr>
           <a:lstStyle/>
@@ -12704,6 +12870,7 @@
           <a:lstStyle/>
           <a:p>
             <a:pPr algn="ctr"/>
+            <a:endParaRPr/>
           </a:p>
         </p:txBody>
       </p:sp>
@@ -12748,6 +12915,7 @@
           <a:lstStyle/>
           <a:p>
             <a:pPr algn="ctr"/>
+            <a:endParaRPr/>
           </a:p>
         </p:txBody>
       </p:sp>
@@ -12768,7 +12936,7 @@
           <a:noFill/>
         </p:spPr>
         <p:txBody>
-          <a:bodyPr wrap="square" lIns="0" rIns="0" tIns="0" bIns="0">
+          <a:bodyPr wrap="square" lIns="0" tIns="0" rIns="0" bIns="0">
             <a:spAutoFit/>
           </a:bodyPr>
           <a:lstStyle/>
@@ -12810,7 +12978,7 @@
           <a:noFill/>
         </p:spPr>
         <p:txBody>
-          <a:bodyPr wrap="square" lIns="0" rIns="0" tIns="0" bIns="0">
+          <a:bodyPr wrap="square" lIns="0" tIns="0" rIns="0" bIns="0">
             <a:spAutoFit/>
           </a:bodyPr>
           <a:lstStyle/>
@@ -12852,7 +13020,7 @@
           <a:noFill/>
         </p:spPr>
         <p:txBody>
-          <a:bodyPr wrap="square" lIns="0" rIns="0" tIns="0" bIns="0">
+          <a:bodyPr wrap="square" lIns="0" tIns="0" rIns="0" bIns="0">
             <a:spAutoFit/>
           </a:bodyPr>
           <a:lstStyle/>
@@ -13047,6 +13215,7 @@
           <a:lstStyle/>
           <a:p>
             <a:pPr algn="ctr"/>
+            <a:endParaRPr/>
           </a:p>
         </p:txBody>
       </p:sp>
@@ -13091,6 +13260,7 @@
           <a:lstStyle/>
           <a:p>
             <a:pPr algn="ctr"/>
+            <a:endParaRPr/>
           </a:p>
         </p:txBody>
       </p:sp>
@@ -13111,7 +13281,7 @@
           <a:noFill/>
         </p:spPr>
         <p:txBody>
-          <a:bodyPr wrap="square" lIns="0" rIns="0" tIns="0" bIns="0">
+          <a:bodyPr wrap="square" lIns="0" tIns="0" rIns="0" bIns="0">
             <a:spAutoFit/>
           </a:bodyPr>
           <a:lstStyle/>
@@ -13154,7 +13324,7 @@
 </file>
 
 <file path=ppt/slides/slide8.xml><?xml version="1.0" encoding="utf-8"?>
-<p:sld xmlns:a="http://schemas.openxmlformats.org/drawingml/2006/main" xmlns:p="http://schemas.openxmlformats.org/presentationml/2006/main" xmlns:r="http://schemas.openxmlformats.org/officeDocument/2006/relationships">
+<p:sld xmlns:a="http://schemas.openxmlformats.org/drawingml/2006/main" xmlns:r="http://schemas.openxmlformats.org/officeDocument/2006/relationships" xmlns:p="http://schemas.openxmlformats.org/presentationml/2006/main">
   <p:cSld>
     <p:spTree>
       <p:nvGrpSpPr>
@@ -13162,7 +13332,14 @@
         <p:cNvGrpSpPr/>
         <p:nvPr/>
       </p:nvGrpSpPr>
-      <p:grpSpPr/>
+      <p:grpSpPr>
+        <a:xfrm>
+          <a:off x="0" y="0"/>
+          <a:ext cx="0" cy="0"/>
+          <a:chOff x="0" y="0"/>
+          <a:chExt cx="0" cy="0"/>
+        </a:xfrm>
+      </p:grpSpPr>
       <p:sp>
         <p:nvSpPr>
           <p:cNvPr id="2" name="Rectangle 1"/>
@@ -13204,6 +13381,7 @@
           <a:lstStyle/>
           <a:p>
             <a:pPr algn="ctr"/>
+            <a:endParaRPr/>
           </a:p>
         </p:txBody>
       </p:sp>
@@ -13224,7 +13402,7 @@
           <a:noFill/>
         </p:spPr>
         <p:txBody>
-          <a:bodyPr wrap="square" lIns="0" rIns="0" tIns="0" bIns="0">
+          <a:bodyPr wrap="square" lIns="0" tIns="0" rIns="0" bIns="0">
             <a:spAutoFit/>
           </a:bodyPr>
           <a:lstStyle/>
@@ -13290,7 +13468,7 @@
           <a:noFill/>
         </p:spPr>
         <p:txBody>
-          <a:bodyPr wrap="square" lIns="0" rIns="0" tIns="0" bIns="0">
+          <a:bodyPr wrap="square" lIns="0" tIns="0" rIns="0" bIns="0">
             <a:spAutoFit/>
           </a:bodyPr>
           <a:lstStyle/>
@@ -13333,7 +13511,7 @@
           <a:noFill/>
         </p:spPr>
         <p:txBody>
-          <a:bodyPr wrap="square" lIns="0" rIns="0" tIns="0" bIns="0">
+          <a:bodyPr wrap="square" lIns="0" tIns="0" rIns="0" bIns="0">
             <a:spAutoFit/>
           </a:bodyPr>
           <a:lstStyle/>
@@ -13375,7 +13553,7 @@
           <a:noFill/>
         </p:spPr>
         <p:txBody>
-          <a:bodyPr wrap="square" lIns="0" rIns="0" tIns="0" bIns="0">
+          <a:bodyPr wrap="square" lIns="0" tIns="0" rIns="0" bIns="0">
             <a:spAutoFit/>
           </a:bodyPr>
           <a:lstStyle/>
@@ -13417,7 +13595,7 @@
           <a:noFill/>
         </p:spPr>
         <p:txBody>
-          <a:bodyPr wrap="square" lIns="0" rIns="0" tIns="0" bIns="0">
+          <a:bodyPr wrap="square" lIns="0" tIns="0" rIns="0" bIns="0">
             <a:spAutoFit/>
           </a:bodyPr>
           <a:lstStyle/>
@@ -13483,6 +13661,7 @@
           <a:lstStyle/>
           <a:p>
             <a:pPr algn="ctr"/>
+            <a:endParaRPr/>
           </a:p>
         </p:txBody>
       </p:sp>
@@ -13527,6 +13706,7 @@
           <a:lstStyle/>
           <a:p>
             <a:pPr algn="ctr"/>
+            <a:endParaRPr/>
           </a:p>
         </p:txBody>
       </p:sp>
@@ -13547,7 +13727,7 @@
           <a:noFill/>
         </p:spPr>
         <p:txBody>
-          <a:bodyPr wrap="square" lIns="0" rIns="0" tIns="0" bIns="0">
+          <a:bodyPr wrap="square" lIns="0" tIns="0" rIns="0" bIns="0">
             <a:spAutoFit/>
           </a:bodyPr>
           <a:lstStyle/>
@@ -13561,13 +13741,31 @@
               </a:spcAft>
             </a:pPr>
             <a:r>
-              <a:rPr sz="1050" b="0" i="0">
+              <a:rPr sz="1050" b="0" i="0" dirty="0">
                 <a:solidFill>
                   <a:srgbClr val="1F3355"/>
                 </a:solidFill>
                 <a:latin typeface="Consolas"/>
               </a:rPr>
-              <a:t>curl -sS -X POST \</a:t>
+              <a:t>curl -</a:t>
+            </a:r>
+            <a:r>
+              <a:rPr sz="1050" b="0" i="0" dirty="0" err="1">
+                <a:solidFill>
+                  <a:srgbClr val="1F3355"/>
+                </a:solidFill>
+                <a:latin typeface="Consolas"/>
+              </a:rPr>
+              <a:t>sS</a:t>
+            </a:r>
+            <a:r>
+              <a:rPr sz="1050" b="0" i="0" dirty="0">
+                <a:solidFill>
+                  <a:srgbClr val="1F3355"/>
+                </a:solidFill>
+                <a:latin typeface="Consolas"/>
+              </a:rPr>
+              <a:t> -X POST \</a:t>
             </a:r>
           </a:p>
           <a:p>
@@ -13580,13 +13778,49 @@
               </a:spcAft>
             </a:pPr>
             <a:r>
-              <a:rPr sz="1050" b="0" i="0">
+              <a:rPr sz="1050" b="0" i="0" dirty="0">
                 <a:solidFill>
                   <a:srgbClr val="1F3355"/>
                 </a:solidFill>
                 <a:latin typeface="Consolas"/>
               </a:rPr>
-              <a:t>  "https://graph.data.era.europa.eu/repositories/rinf-plus" \</a:t>
+              <a:t>  "https://</a:t>
+            </a:r>
+            <a:r>
+              <a:rPr sz="1050" b="0" i="0" dirty="0" err="1">
+                <a:solidFill>
+                  <a:srgbClr val="1F3355"/>
+                </a:solidFill>
+                <a:latin typeface="Consolas"/>
+              </a:rPr>
+              <a:t>graph.data.era.europa.eu</a:t>
+            </a:r>
+            <a:r>
+              <a:rPr sz="1050" b="0" i="0" dirty="0">
+                <a:solidFill>
+                  <a:srgbClr val="1F3355"/>
+                </a:solidFill>
+                <a:latin typeface="Consolas"/>
+              </a:rPr>
+              <a:t>/repositories/</a:t>
+            </a:r>
+            <a:r>
+              <a:rPr sz="1050" b="0" i="0" dirty="0" err="1">
+                <a:solidFill>
+                  <a:srgbClr val="1F3355"/>
+                </a:solidFill>
+                <a:latin typeface="Consolas"/>
+              </a:rPr>
+              <a:t>rinf</a:t>
+            </a:r>
+            <a:r>
+              <a:rPr sz="1050" b="0" i="0" dirty="0">
+                <a:solidFill>
+                  <a:srgbClr val="1F3355"/>
+                </a:solidFill>
+                <a:latin typeface="Consolas"/>
+              </a:rPr>
+              <a:t>-plus" \</a:t>
             </a:r>
           </a:p>
           <a:p>
@@ -13599,13 +13833,31 @@
               </a:spcAft>
             </a:pPr>
             <a:r>
-              <a:rPr sz="1050" b="0" i="0">
+              <a:rPr sz="1050" b="0" i="0" dirty="0">
                 <a:solidFill>
                   <a:srgbClr val="1F3355"/>
                 </a:solidFill>
                 <a:latin typeface="Consolas"/>
               </a:rPr>
-              <a:t>  -H "Content-Type: application/sparql-query" \</a:t>
+              <a:t>  -H "Content-Type: application/</a:t>
+            </a:r>
+            <a:r>
+              <a:rPr sz="1050" b="0" i="0" dirty="0" err="1">
+                <a:solidFill>
+                  <a:srgbClr val="1F3355"/>
+                </a:solidFill>
+                <a:latin typeface="Consolas"/>
+              </a:rPr>
+              <a:t>sparql</a:t>
+            </a:r>
+            <a:r>
+              <a:rPr sz="1050" b="0" i="0" dirty="0">
+                <a:solidFill>
+                  <a:srgbClr val="1F3355"/>
+                </a:solidFill>
+                <a:latin typeface="Consolas"/>
+              </a:rPr>
+              <a:t>-query" \</a:t>
             </a:r>
           </a:p>
           <a:p>
@@ -13618,7 +13870,7 @@
               </a:spcAft>
             </a:pPr>
             <a:r>
-              <a:rPr sz="1050" b="0" i="0">
+              <a:rPr sz="1050" b="0" i="0" dirty="0">
                 <a:solidFill>
                   <a:srgbClr val="1F3355"/>
                 </a:solidFill>
@@ -13637,13 +13889,31 @@
               </a:spcAft>
             </a:pPr>
             <a:r>
-              <a:rPr sz="1050" b="0" i="0">
+              <a:rPr sz="1050" b="0" i="0" dirty="0">
                 <a:solidFill>
                   <a:srgbClr val="1F3355"/>
                 </a:solidFill>
                 <a:latin typeface="Consolas"/>
               </a:rPr>
-              <a:t>    ?p era:rinfIndex "1.1.1.1.4.1" . ?track ?p ?value }</a:t>
+              <a:t>    ?p </a:t>
+            </a:r>
+            <a:r>
+              <a:rPr sz="1050" b="0" i="0" dirty="0" err="1">
+                <a:solidFill>
+                  <a:srgbClr val="1F3355"/>
+                </a:solidFill>
+                <a:latin typeface="Consolas"/>
+              </a:rPr>
+              <a:t>era:rinfIndex</a:t>
+            </a:r>
+            <a:r>
+              <a:rPr sz="1050" b="0" i="0" dirty="0">
+                <a:solidFill>
+                  <a:srgbClr val="1F3355"/>
+                </a:solidFill>
+                <a:latin typeface="Consolas"/>
+              </a:rPr>
+              <a:t> "1.1.1.1.4.1" . ?track ?p ?value }</a:t>
             </a:r>
           </a:p>
           <a:p>
@@ -13656,7 +13926,7 @@
               </a:spcAft>
             </a:pPr>
             <a:r>
-              <a:rPr sz="1050" b="0" i="0">
+              <a:rPr sz="1050" b="0" i="0" dirty="0">
                 <a:solidFill>
                   <a:srgbClr val="1F3355"/>
                 </a:solidFill>
@@ -13684,7 +13954,7 @@
           <a:noFill/>
         </p:spPr>
         <p:txBody>
-          <a:bodyPr wrap="square" lIns="0" rIns="0" tIns="0" bIns="0">
+          <a:bodyPr wrap="square" lIns="0" tIns="0" rIns="0" bIns="0">
             <a:spAutoFit/>
           </a:bodyPr>
           <a:lstStyle/>
@@ -13726,7 +13996,7 @@
           <a:noFill/>
         </p:spPr>
         <p:txBody>
-          <a:bodyPr wrap="square" lIns="0" rIns="0" tIns="0" bIns="0">
+          <a:bodyPr wrap="square" lIns="0" tIns="0" rIns="0" bIns="0">
             <a:spAutoFit/>
           </a:bodyPr>
           <a:lstStyle/>
@@ -13768,7 +14038,7 @@
           <a:noFill/>
         </p:spPr>
         <p:txBody>
-          <a:bodyPr wrap="square" lIns="0" rIns="0" tIns="0" bIns="0">
+          <a:bodyPr wrap="square" lIns="0" tIns="0" rIns="0" bIns="0">
             <a:spAutoFit/>
           </a:bodyPr>
           <a:lstStyle/>
@@ -14111,6 +14381,7 @@
           <a:lstStyle/>
           <a:p>
             <a:pPr algn="ctr"/>
+            <a:endParaRPr/>
           </a:p>
         </p:txBody>
       </p:sp>
@@ -14155,6 +14426,7 @@
           <a:lstStyle/>
           <a:p>
             <a:pPr algn="ctr"/>
+            <a:endParaRPr/>
           </a:p>
         </p:txBody>
       </p:sp>
@@ -14175,7 +14447,7 @@
           <a:noFill/>
         </p:spPr>
         <p:txBody>
-          <a:bodyPr wrap="square" lIns="0" rIns="0" tIns="0" bIns="0">
+          <a:bodyPr wrap="square" lIns="0" tIns="0" rIns="0" bIns="0">
             <a:spAutoFit/>
           </a:bodyPr>
           <a:lstStyle/>
@@ -14218,7 +14490,7 @@
 </file>
 
 <file path=ppt/slides/slide9.xml><?xml version="1.0" encoding="utf-8"?>
-<p:sld xmlns:a="http://schemas.openxmlformats.org/drawingml/2006/main" xmlns:p="http://schemas.openxmlformats.org/presentationml/2006/main" xmlns:r="http://schemas.openxmlformats.org/officeDocument/2006/relationships">
+<p:sld xmlns:a="http://schemas.openxmlformats.org/drawingml/2006/main" xmlns:r="http://schemas.openxmlformats.org/officeDocument/2006/relationships" xmlns:p="http://schemas.openxmlformats.org/presentationml/2006/main">
   <p:cSld>
     <p:spTree>
       <p:nvGrpSpPr>
@@ -14226,7 +14498,14 @@
         <p:cNvGrpSpPr/>
         <p:nvPr/>
       </p:nvGrpSpPr>
-      <p:grpSpPr/>
+      <p:grpSpPr>
+        <a:xfrm>
+          <a:off x="0" y="0"/>
+          <a:ext cx="0" cy="0"/>
+          <a:chOff x="0" y="0"/>
+          <a:chExt cx="0" cy="0"/>
+        </a:xfrm>
+      </p:grpSpPr>
       <p:sp>
         <p:nvSpPr>
           <p:cNvPr id="2" name="Rectangle 1"/>
@@ -14268,6 +14547,7 @@
           <a:lstStyle/>
           <a:p>
             <a:pPr algn="ctr"/>
+            <a:endParaRPr/>
           </a:p>
         </p:txBody>
       </p:sp>
@@ -14312,7 +14592,7 @@
           <a:noFill/>
         </p:spPr>
         <p:txBody>
-          <a:bodyPr wrap="square" lIns="0" rIns="0" tIns="0" bIns="0">
+          <a:bodyPr wrap="square" lIns="0" tIns="0" rIns="0" bIns="0">
             <a:spAutoFit/>
           </a:bodyPr>
           <a:lstStyle/>
@@ -14378,6 +14658,7 @@
           <a:lstStyle/>
           <a:p>
             <a:pPr algn="ctr"/>
+            <a:endParaRPr/>
           </a:p>
         </p:txBody>
       </p:sp>
@@ -14398,7 +14679,7 @@
           <a:noFill/>
         </p:spPr>
         <p:txBody>
-          <a:bodyPr wrap="square" lIns="0" rIns="0" tIns="0" bIns="0">
+          <a:bodyPr wrap="square" lIns="0" tIns="0" rIns="0" bIns="0">
             <a:spAutoFit/>
           </a:bodyPr>
           <a:lstStyle/>
@@ -14535,7 +14816,7 @@
           <a:noFill/>
         </p:spPr>
         <p:txBody>
-          <a:bodyPr wrap="square" lIns="0" rIns="0" tIns="0" bIns="0">
+          <a:bodyPr wrap="square" lIns="0" tIns="0" rIns="0" bIns="0">
             <a:spAutoFit/>
           </a:bodyPr>
           <a:lstStyle/>
@@ -14672,7 +14953,7 @@
           <a:noFill/>
         </p:spPr>
         <p:txBody>
-          <a:bodyPr wrap="square" lIns="0" rIns="0" tIns="0" bIns="0">
+          <a:bodyPr wrap="square" lIns="0" tIns="0" rIns="0" bIns="0">
             <a:spAutoFit/>
           </a:bodyPr>
           <a:lstStyle/>
